--- a/docs/decks/PadiLearn-Investor-Pitch.pptx
+++ b/docs/decks/PadiLearn-Investor-Pitch.pptx
@@ -513,7 +513,7 @@
           <a:p>
             <a:r>
               <a:rPr lang="en-US" dirty="0"/>
-              <a:t>This deck ships with placeholders on every slide that needs real data. Do not present it until those are filled — an investor will ask for exactly those numbers first.</a:t>
+              <a:t/>
             </a:r>
             <a:endParaRPr lang="en-US" dirty="0"/>
           </a:p>
@@ -1481,7 +1481,7 @@
           <a:p>
             <a:r>
               <a:rPr lang="en-US" dirty="0"/>
-              <a:t>Saying plainly where you lose makes the columns where you win believable. Investors discount decks where every row is a win.</a:t>
+              <a:t/>
             </a:r>
             <a:endParaRPr lang="en-US" dirty="0"/>
           </a:p>
@@ -2051,7 +2051,7 @@
                 <a:ea typeface="Calibri" pitchFamily="34" charset="-122"/>
                 <a:cs typeface="Calibri" pitchFamily="34" charset="-120"/>
               </a:rPr>
-              <a:t>Amber blocks mark the slides where your own figures are required</a:t>
+              <a:t>Confidential</a:t>
             </a:r>
             <a:endParaRPr lang="en-US" sz="1150" dirty="0"/>
           </a:p>
@@ -2154,7 +2154,7 @@
                 <a:ea typeface="Calibri" pitchFamily="34" charset="-122"/>
                 <a:cs typeface="Calibri" pitchFamily="34" charset="-120"/>
               </a:rPr>
-              <a:t>Sequenced by what removes the most risk, not by what is easiest.</a:t>
+              <a:t>Sequenced by what removes the most risk first.</a:t>
             </a:r>
             <a:endParaRPr lang="en-US" sz="1500" dirty="0"/>
           </a:p>
@@ -2942,57 +2942,18 @@
       </p:sp>
       <p:sp>
         <p:nvSpPr>
-          <p:cNvPr id="3" name="Text 1"/>
-          <p:cNvSpPr txBox="1"/>
-          <p:nvPr/>
-        </p:nvSpPr>
-        <p:spPr>
-          <a:xfrm>
-            <a:off x="640080" y="1170432"/>
-            <a:ext cx="10881360" cy="384048"/>
-          </a:xfrm>
-          <a:prstGeom prst="rect">
-            <a:avLst/>
-          </a:prstGeom>
-          <a:noFill/>
-          <a:ln/>
-        </p:spPr>
-        <p:txBody>
-          <a:bodyPr wrap="square" rtlCol="0" anchor="ctr"/>
-          <a:lstStyle/>
-          <a:p>
-            <a:pPr indent="0" marL="0">
-              <a:buNone/>
-            </a:pPr>
-            <a:r>
-              <a:rPr lang="en-US" sz="1500" dirty="0">
-                <a:solidFill>
-                  <a:srgbClr val="6A7278"/>
-                </a:solidFill>
-                <a:latin typeface="Calibri" pitchFamily="34" charset="0"/>
-                <a:ea typeface="Calibri" pitchFamily="34" charset="-122"/>
-                <a:cs typeface="Calibri" pitchFamily="34" charset="-120"/>
-              </a:rPr>
-              <a:t>Both need your real detail before this deck goes anywhere.</a:t>
-            </a:r>
-            <a:endParaRPr lang="en-US" sz="1500" dirty="0"/>
-          </a:p>
-        </p:txBody>
-      </p:sp>
-      <p:sp>
-        <p:nvSpPr>
-          <p:cNvPr id="4" name="Shape 2"/>
+          <p:cNvPr id="3" name="Shape 1"/>
           <p:cNvSpPr/>
           <p:nvPr/>
         </p:nvSpPr>
         <p:spPr>
           <a:xfrm>
-            <a:off x="640080" y="1783080"/>
-            <a:ext cx="5303520" cy="3931920"/>
+            <a:off x="640080" y="1417320"/>
+            <a:ext cx="5303520" cy="4572000"/>
           </a:xfrm>
           <a:prstGeom prst="roundRect">
             <a:avLst>
-              <a:gd name="adj" fmla="val 2326"/>
+              <a:gd name="adj" fmla="val 2000"/>
             </a:avLst>
           </a:prstGeom>
           <a:solidFill>
@@ -3010,13 +2971,13 @@
       </p:sp>
       <p:sp>
         <p:nvSpPr>
-          <p:cNvPr id="5" name="Text 3"/>
-          <p:cNvSpPr txBox="1"/>
-          <p:nvPr/>
-        </p:nvSpPr>
-        <p:spPr>
-          <a:xfrm>
-            <a:off x="1005840" y="2057400"/>
+          <p:cNvPr id="4" name="Text 2"/>
+          <p:cNvSpPr txBox="1"/>
+          <p:nvPr/>
+        </p:nvSpPr>
+        <p:spPr>
+          <a:xfrm>
+            <a:off x="1005840" y="1691640"/>
             <a:ext cx="4572000" cy="365760"/>
           </a:xfrm>
           <a:prstGeom prst="rect">
@@ -3049,164 +3010,312 @@
       </p:sp>
       <p:sp>
         <p:nvSpPr>
-          <p:cNvPr id="6" name="Shape 4"/>
+          <p:cNvPr id="5" name="Shape 3"/>
           <p:cNvSpPr/>
           <p:nvPr/>
         </p:nvSpPr>
         <p:spPr>
           <a:xfrm>
-            <a:off x="1005840" y="2514600"/>
-            <a:ext cx="2971800" cy="310896"/>
+            <a:off x="1005840" y="2468880"/>
+            <a:ext cx="548640" cy="548640"/>
+          </a:xfrm>
+          <a:prstGeom prst="ellipse">
+            <a:avLst/>
+          </a:prstGeom>
+          <a:solidFill>
+            <a:srgbClr val="FFFFFF"/>
+          </a:solidFill>
+          <a:ln/>
+        </p:spPr>
+      </p:sp>
+      <p:sp>
+        <p:nvSpPr>
+          <p:cNvPr id="6" name="Text 4"/>
+          <p:cNvSpPr txBox="1"/>
+          <p:nvPr/>
+        </p:nvSpPr>
+        <p:spPr>
+          <a:xfrm>
+            <a:off x="1783080" y="2450592"/>
+            <a:ext cx="3749040" cy="320040"/>
+          </a:xfrm>
+          <a:prstGeom prst="rect">
+            <a:avLst/>
+          </a:prstGeom>
+          <a:noFill/>
+          <a:ln/>
+        </p:spPr>
+        <p:txBody>
+          <a:bodyPr wrap="square" lIns="0" tIns="0" rIns="0" bIns="0" rtlCol="0" anchor="ctr"/>
+          <a:lstStyle/>
+          <a:p>
+            <a:pPr indent="0" marL="0">
+              <a:buNone/>
+            </a:pPr>
+            <a:r>
+              <a:rPr lang="en-US" sz="1500" b="1" dirty="0">
+                <a:solidFill>
+                  <a:srgbClr val="0D1B2A"/>
+                </a:solidFill>
+                <a:latin typeface="Calibri" pitchFamily="34" charset="0"/>
+                <a:ea typeface="Calibri" pitchFamily="34" charset="-122"/>
+                <a:cs typeface="Calibri" pitchFamily="34" charset="-120"/>
+              </a:rPr>
+              <a:t>—</a:t>
+            </a:r>
+            <a:endParaRPr lang="en-US" sz="1500" dirty="0"/>
+          </a:p>
+        </p:txBody>
+      </p:sp>
+      <p:sp>
+        <p:nvSpPr>
+          <p:cNvPr id="7" name="Text 5"/>
+          <p:cNvSpPr txBox="1"/>
+          <p:nvPr/>
+        </p:nvSpPr>
+        <p:spPr>
+          <a:xfrm>
+            <a:off x="1783080" y="2752344"/>
+            <a:ext cx="3749040" cy="274320"/>
+          </a:xfrm>
+          <a:prstGeom prst="rect">
+            <a:avLst/>
+          </a:prstGeom>
+          <a:noFill/>
+          <a:ln/>
+        </p:spPr>
+        <p:txBody>
+          <a:bodyPr wrap="square" lIns="0" tIns="0" rIns="0" bIns="0" rtlCol="0" anchor="ctr"/>
+          <a:lstStyle/>
+          <a:p>
+            <a:pPr indent="0" marL="0">
+              <a:buNone/>
+            </a:pPr>
+            <a:r>
+              <a:rPr lang="en-US" sz="1250" dirty="0">
+                <a:solidFill>
+                  <a:srgbClr val="6A7278"/>
+                </a:solidFill>
+                <a:latin typeface="Calibri" pitchFamily="34" charset="0"/>
+                <a:ea typeface="Calibri" pitchFamily="34" charset="-122"/>
+                <a:cs typeface="Calibri" pitchFamily="34" charset="-120"/>
+              </a:rPr>
+              <a:t>Role</a:t>
+            </a:r>
+            <a:endParaRPr lang="en-US" sz="1250" dirty="0"/>
+          </a:p>
+        </p:txBody>
+      </p:sp>
+      <p:sp>
+        <p:nvSpPr>
+          <p:cNvPr id="8" name="Shape 6"/>
+          <p:cNvSpPr/>
+          <p:nvPr/>
+        </p:nvSpPr>
+        <p:spPr>
+          <a:xfrm>
+            <a:off x="1005840" y="3611880"/>
+            <a:ext cx="548640" cy="548640"/>
+          </a:xfrm>
+          <a:prstGeom prst="ellipse">
+            <a:avLst/>
+          </a:prstGeom>
+          <a:solidFill>
+            <a:srgbClr val="FFFFFF"/>
+          </a:solidFill>
+          <a:ln/>
+        </p:spPr>
+      </p:sp>
+      <p:sp>
+        <p:nvSpPr>
+          <p:cNvPr id="9" name="Text 7"/>
+          <p:cNvSpPr txBox="1"/>
+          <p:nvPr/>
+        </p:nvSpPr>
+        <p:spPr>
+          <a:xfrm>
+            <a:off x="1783080" y="3593592"/>
+            <a:ext cx="3749040" cy="320040"/>
+          </a:xfrm>
+          <a:prstGeom prst="rect">
+            <a:avLst/>
+          </a:prstGeom>
+          <a:noFill/>
+          <a:ln/>
+        </p:spPr>
+        <p:txBody>
+          <a:bodyPr wrap="square" lIns="0" tIns="0" rIns="0" bIns="0" rtlCol="0" anchor="ctr"/>
+          <a:lstStyle/>
+          <a:p>
+            <a:pPr indent="0" marL="0">
+              <a:buNone/>
+            </a:pPr>
+            <a:r>
+              <a:rPr lang="en-US" sz="1500" b="1" dirty="0">
+                <a:solidFill>
+                  <a:srgbClr val="0D1B2A"/>
+                </a:solidFill>
+                <a:latin typeface="Calibri" pitchFamily="34" charset="0"/>
+                <a:ea typeface="Calibri" pitchFamily="34" charset="-122"/>
+                <a:cs typeface="Calibri" pitchFamily="34" charset="-120"/>
+              </a:rPr>
+              <a:t>—</a:t>
+            </a:r>
+            <a:endParaRPr lang="en-US" sz="1500" dirty="0"/>
+          </a:p>
+        </p:txBody>
+      </p:sp>
+      <p:sp>
+        <p:nvSpPr>
+          <p:cNvPr id="10" name="Text 8"/>
+          <p:cNvSpPr txBox="1"/>
+          <p:nvPr/>
+        </p:nvSpPr>
+        <p:spPr>
+          <a:xfrm>
+            <a:off x="1783080" y="3895344"/>
+            <a:ext cx="3749040" cy="274320"/>
+          </a:xfrm>
+          <a:prstGeom prst="rect">
+            <a:avLst/>
+          </a:prstGeom>
+          <a:noFill/>
+          <a:ln/>
+        </p:spPr>
+        <p:txBody>
+          <a:bodyPr wrap="square" lIns="0" tIns="0" rIns="0" bIns="0" rtlCol="0" anchor="ctr"/>
+          <a:lstStyle/>
+          <a:p>
+            <a:pPr indent="0" marL="0">
+              <a:buNone/>
+            </a:pPr>
+            <a:r>
+              <a:rPr lang="en-US" sz="1250" dirty="0">
+                <a:solidFill>
+                  <a:srgbClr val="6A7278"/>
+                </a:solidFill>
+                <a:latin typeface="Calibri" pitchFamily="34" charset="0"/>
+                <a:ea typeface="Calibri" pitchFamily="34" charset="-122"/>
+                <a:cs typeface="Calibri" pitchFamily="34" charset="-120"/>
+              </a:rPr>
+              <a:t>Role</a:t>
+            </a:r>
+            <a:endParaRPr lang="en-US" sz="1250" dirty="0"/>
+          </a:p>
+        </p:txBody>
+      </p:sp>
+      <p:sp>
+        <p:nvSpPr>
+          <p:cNvPr id="11" name="Shape 9"/>
+          <p:cNvSpPr/>
+          <p:nvPr/>
+        </p:nvSpPr>
+        <p:spPr>
+          <a:xfrm>
+            <a:off x="1005840" y="4754880"/>
+            <a:ext cx="548640" cy="548640"/>
+          </a:xfrm>
+          <a:prstGeom prst="ellipse">
+            <a:avLst/>
+          </a:prstGeom>
+          <a:solidFill>
+            <a:srgbClr val="FFFFFF"/>
+          </a:solidFill>
+          <a:ln/>
+        </p:spPr>
+      </p:sp>
+      <p:sp>
+        <p:nvSpPr>
+          <p:cNvPr id="12" name="Text 10"/>
+          <p:cNvSpPr txBox="1"/>
+          <p:nvPr/>
+        </p:nvSpPr>
+        <p:spPr>
+          <a:xfrm>
+            <a:off x="1783080" y="4736592"/>
+            <a:ext cx="3749040" cy="320040"/>
+          </a:xfrm>
+          <a:prstGeom prst="rect">
+            <a:avLst/>
+          </a:prstGeom>
+          <a:noFill/>
+          <a:ln/>
+        </p:spPr>
+        <p:txBody>
+          <a:bodyPr wrap="square" lIns="0" tIns="0" rIns="0" bIns="0" rtlCol="0" anchor="ctr"/>
+          <a:lstStyle/>
+          <a:p>
+            <a:pPr indent="0" marL="0">
+              <a:buNone/>
+            </a:pPr>
+            <a:r>
+              <a:rPr lang="en-US" sz="1500" b="1" dirty="0">
+                <a:solidFill>
+                  <a:srgbClr val="0D1B2A"/>
+                </a:solidFill>
+                <a:latin typeface="Calibri" pitchFamily="34" charset="0"/>
+                <a:ea typeface="Calibri" pitchFamily="34" charset="-122"/>
+                <a:cs typeface="Calibri" pitchFamily="34" charset="-120"/>
+              </a:rPr>
+              <a:t>—</a:t>
+            </a:r>
+            <a:endParaRPr lang="en-US" sz="1500" dirty="0"/>
+          </a:p>
+        </p:txBody>
+      </p:sp>
+      <p:sp>
+        <p:nvSpPr>
+          <p:cNvPr id="13" name="Text 11"/>
+          <p:cNvSpPr txBox="1"/>
+          <p:nvPr/>
+        </p:nvSpPr>
+        <p:spPr>
+          <a:xfrm>
+            <a:off x="1783080" y="5038344"/>
+            <a:ext cx="3749040" cy="274320"/>
+          </a:xfrm>
+          <a:prstGeom prst="rect">
+            <a:avLst/>
+          </a:prstGeom>
+          <a:noFill/>
+          <a:ln/>
+        </p:spPr>
+        <p:txBody>
+          <a:bodyPr wrap="square" lIns="0" tIns="0" rIns="0" bIns="0" rtlCol="0" anchor="ctr"/>
+          <a:lstStyle/>
+          <a:p>
+            <a:pPr indent="0" marL="0">
+              <a:buNone/>
+            </a:pPr>
+            <a:r>
+              <a:rPr lang="en-US" sz="1250" dirty="0">
+                <a:solidFill>
+                  <a:srgbClr val="6A7278"/>
+                </a:solidFill>
+                <a:latin typeface="Calibri" pitchFamily="34" charset="0"/>
+                <a:ea typeface="Calibri" pitchFamily="34" charset="-122"/>
+                <a:cs typeface="Calibri" pitchFamily="34" charset="-120"/>
+              </a:rPr>
+              <a:t>Role</a:t>
+            </a:r>
+            <a:endParaRPr lang="en-US" sz="1250" dirty="0"/>
+          </a:p>
+        </p:txBody>
+      </p:sp>
+      <p:sp>
+        <p:nvSpPr>
+          <p:cNvPr id="14" name="Shape 12"/>
+          <p:cNvSpPr/>
+          <p:nvPr/>
+        </p:nvSpPr>
+        <p:spPr>
+          <a:xfrm>
+            <a:off x="6217920" y="1417320"/>
+            <a:ext cx="5303520" cy="4572000"/>
           </a:xfrm>
           <a:prstGeom prst="roundRect">
             <a:avLst>
-              <a:gd name="adj" fmla="val 50000"/>
-            </a:avLst>
-          </a:prstGeom>
-          <a:solidFill>
-            <a:srgbClr val="E8A33D"/>
-          </a:solidFill>
-          <a:ln/>
-        </p:spPr>
-      </p:sp>
-      <p:sp>
-        <p:nvSpPr>
-          <p:cNvPr id="7" name="Text 5"/>
-          <p:cNvSpPr txBox="1"/>
-          <p:nvPr/>
-        </p:nvSpPr>
-        <p:spPr>
-          <a:xfrm>
-            <a:off x="1005840" y="2514600"/>
-            <a:ext cx="2971800" cy="310896"/>
-          </a:xfrm>
-          <a:prstGeom prst="rect">
-            <a:avLst/>
-          </a:prstGeom>
-          <a:noFill/>
-          <a:ln/>
-        </p:spPr>
-        <p:txBody>
-          <a:bodyPr wrap="square" lIns="0" tIns="0" rIns="0" bIns="0" rtlCol="0" anchor="ctr"/>
-          <a:lstStyle/>
-          <a:p>
-            <a:pPr algn="ctr" indent="0" marL="0">
-              <a:buNone/>
-            </a:pPr>
-            <a:r>
-              <a:rPr lang="en-US" sz="1050" b="1" dirty="0">
-                <a:solidFill>
-                  <a:srgbClr val="0D1B2A"/>
-                </a:solidFill>
-                <a:latin typeface="Calibri" pitchFamily="34" charset="0"/>
-                <a:ea typeface="Calibri" pitchFamily="34" charset="-122"/>
-                <a:cs typeface="Calibri" pitchFamily="34" charset="-120"/>
-              </a:rPr>
-              <a:t>YOUR NUMBERS GO HERE</a:t>
-            </a:r>
-            <a:endParaRPr lang="en-US" sz="1050" dirty="0"/>
-          </a:p>
-        </p:txBody>
-      </p:sp>
-      <p:sp>
-        <p:nvSpPr>
-          <p:cNvPr id="8" name="Text 6"/>
-          <p:cNvSpPr txBox="1"/>
-          <p:nvPr/>
-        </p:nvSpPr>
-        <p:spPr>
-          <a:xfrm>
-            <a:off x="1005840" y="3017520"/>
-            <a:ext cx="4572000" cy="2011680"/>
-          </a:xfrm>
-          <a:prstGeom prst="rect">
-            <a:avLst/>
-          </a:prstGeom>
-          <a:noFill/>
-          <a:ln/>
-        </p:spPr>
-        <p:txBody>
-          <a:bodyPr wrap="square" lIns="0" tIns="0" rIns="0" bIns="0" rtlCol="0" anchor="ctr"/>
-          <a:lstStyle/>
-          <a:p>
-            <a:pPr marL="342900" indent="-342900">
-              <a:spcAft>
-                <a:spcPts val="800"/>
-              </a:spcAft>
-              <a:buSzPct val="100000"/>
-              <a:buChar char="•"/>
-            </a:pPr>
-            <a:r>
-              <a:rPr lang="en-US" sz="1300" dirty="0">
-                <a:solidFill>
-                  <a:srgbClr val="0D1B2A"/>
-                </a:solidFill>
-                <a:latin typeface="Calibri" pitchFamily="34" charset="0"/>
-                <a:ea typeface="Calibri" pitchFamily="34" charset="-122"/>
-                <a:cs typeface="Calibri" pitchFamily="34" charset="-120"/>
-              </a:rPr>
-              <a:t>Who is building it, and what each person has shipped before</a:t>
-            </a:r>
-            <a:endParaRPr lang="en-US" sz="1300" dirty="0"/>
-          </a:p>
-          <a:p>
-            <a:pPr marL="342900" indent="-342900">
-              <a:spcAft>
-                <a:spcPts val="800"/>
-              </a:spcAft>
-              <a:buSzPct val="100000"/>
-              <a:buChar char="•"/>
-            </a:pPr>
-            <a:r>
-              <a:rPr lang="en-US" sz="1300" dirty="0">
-                <a:solidFill>
-                  <a:srgbClr val="0D1B2A"/>
-                </a:solidFill>
-                <a:latin typeface="Calibri" pitchFamily="34" charset="0"/>
-                <a:ea typeface="Calibri" pitchFamily="34" charset="-122"/>
-                <a:cs typeface="Calibri" pitchFamily="34" charset="-120"/>
-              </a:rPr>
-              <a:t>Why this team for this market — distribution or teaching relationships count double</a:t>
-            </a:r>
-            <a:endParaRPr lang="en-US" sz="1300" dirty="0"/>
-          </a:p>
-          <a:p>
-            <a:pPr marL="342900" indent="-342900">
-              <a:spcAft>
-                <a:spcPts val="800"/>
-              </a:spcAft>
-              <a:buSzPct val="100000"/>
-              <a:buChar char="•"/>
-            </a:pPr>
-            <a:r>
-              <a:rPr lang="en-US" sz="1300" dirty="0">
-                <a:solidFill>
-                  <a:srgbClr val="0D1B2A"/>
-                </a:solidFill>
-                <a:latin typeface="Calibri" pitchFamily="34" charset="0"/>
-                <a:ea typeface="Calibri" pitchFamily="34" charset="-122"/>
-                <a:cs typeface="Calibri" pitchFamily="34" charset="-120"/>
-              </a:rPr>
-              <a:t>Advisers, and any gaps you are hiring for</a:t>
-            </a:r>
-            <a:endParaRPr lang="en-US" sz="1300" dirty="0"/>
-          </a:p>
-        </p:txBody>
-      </p:sp>
-      <p:sp>
-        <p:nvSpPr>
-          <p:cNvPr id="9" name="Shape 7"/>
-          <p:cNvSpPr/>
-          <p:nvPr/>
-        </p:nvSpPr>
-        <p:spPr>
-          <a:xfrm>
-            <a:off x="6217920" y="1783080"/>
-            <a:ext cx="5303520" cy="3931920"/>
-          </a:xfrm>
-          <a:prstGeom prst="roundRect">
-            <a:avLst>
-              <a:gd name="adj" fmla="val 2326"/>
+              <a:gd name="adj" fmla="val 2000"/>
             </a:avLst>
           </a:prstGeom>
           <a:solidFill>
@@ -3224,13 +3333,13 @@
       </p:sp>
       <p:sp>
         <p:nvSpPr>
-          <p:cNvPr id="10" name="Text 8"/>
-          <p:cNvSpPr txBox="1"/>
-          <p:nvPr/>
-        </p:nvSpPr>
-        <p:spPr>
-          <a:xfrm>
-            <a:off x="6583680" y="2057400"/>
+          <p:cNvPr id="15" name="Text 13"/>
+          <p:cNvSpPr txBox="1"/>
+          <p:nvPr/>
+        </p:nvSpPr>
+        <p:spPr>
+          <a:xfrm>
+            <a:off x="6583680" y="1691640"/>
             <a:ext cx="4572000" cy="365760"/>
           </a:xfrm>
           <a:prstGeom prst="rect">
@@ -3263,36 +3372,14 @@
       </p:sp>
       <p:sp>
         <p:nvSpPr>
-          <p:cNvPr id="11" name="Shape 9"/>
-          <p:cNvSpPr/>
-          <p:nvPr/>
-        </p:nvSpPr>
-        <p:spPr>
-          <a:xfrm>
-            <a:off x="6583680" y="2514600"/>
-            <a:ext cx="2971800" cy="310896"/>
-          </a:xfrm>
-          <a:prstGeom prst="roundRect">
-            <a:avLst>
-              <a:gd name="adj" fmla="val 50000"/>
-            </a:avLst>
-          </a:prstGeom>
-          <a:solidFill>
-            <a:srgbClr val="E8A33D"/>
-          </a:solidFill>
-          <a:ln/>
-        </p:spPr>
-      </p:sp>
-      <p:sp>
-        <p:nvSpPr>
-          <p:cNvPr id="12" name="Text 10"/>
-          <p:cNvSpPr txBox="1"/>
-          <p:nvPr/>
-        </p:nvSpPr>
-        <p:spPr>
-          <a:xfrm>
-            <a:off x="6583680" y="2514600"/>
-            <a:ext cx="2971800" cy="310896"/>
+          <p:cNvPr id="16" name="Text 14"/>
+          <p:cNvSpPr txBox="1"/>
+          <p:nvPr/>
+        </p:nvSpPr>
+        <p:spPr>
+          <a:xfrm>
+            <a:off x="6583680" y="2240280"/>
+            <a:ext cx="4572000" cy="320040"/>
           </a:xfrm>
           <a:prstGeom prst="rect">
             <a:avLst/>
@@ -3304,11 +3391,128 @@
           <a:bodyPr wrap="square" lIns="0" tIns="0" rIns="0" bIns="0" rtlCol="0" anchor="ctr"/>
           <a:lstStyle/>
           <a:p>
-            <a:pPr algn="ctr" indent="0" marL="0">
-              <a:buNone/>
-            </a:pPr>
-            <a:r>
-              <a:rPr lang="en-US" sz="1050" b="1" dirty="0">
+            <a:pPr indent="0" marL="0">
+              <a:buNone/>
+            </a:pPr>
+            <a:r>
+              <a:rPr lang="en-US" sz="1150" b="1" spc="100" kern="0" dirty="0">
+                <a:solidFill>
+                  <a:srgbClr val="6A7278"/>
+                </a:solidFill>
+                <a:latin typeface="Calibri" pitchFamily="34" charset="0"/>
+                <a:ea typeface="Calibri" pitchFamily="34" charset="-122"/>
+                <a:cs typeface="Calibri" pitchFamily="34" charset="-120"/>
+              </a:rPr>
+              <a:t>RAISING</a:t>
+            </a:r>
+            <a:endParaRPr lang="en-US" sz="1150" dirty="0"/>
+          </a:p>
+        </p:txBody>
+      </p:sp>
+      <p:sp>
+        <p:nvSpPr>
+          <p:cNvPr id="17" name="Text 15"/>
+          <p:cNvSpPr txBox="1"/>
+          <p:nvPr/>
+        </p:nvSpPr>
+        <p:spPr>
+          <a:xfrm>
+            <a:off x="6583680" y="2606040"/>
+            <a:ext cx="4572000" cy="960120"/>
+          </a:xfrm>
+          <a:prstGeom prst="rect">
+            <a:avLst/>
+          </a:prstGeom>
+          <a:noFill/>
+          <a:ln/>
+        </p:spPr>
+        <p:txBody>
+          <a:bodyPr wrap="square" lIns="0" tIns="0" rIns="0" bIns="0" rtlCol="0" anchor="ctr"/>
+          <a:lstStyle/>
+          <a:p>
+            <a:pPr indent="0" marL="0">
+              <a:buNone/>
+            </a:pPr>
+            <a:r>
+              <a:rPr lang="en-US" sz="5000" b="1" dirty="0">
+                <a:solidFill>
+                  <a:srgbClr val="32936F"/>
+                </a:solidFill>
+                <a:latin typeface="Cambria" pitchFamily="34" charset="0"/>
+                <a:ea typeface="Cambria" pitchFamily="34" charset="-122"/>
+                <a:cs typeface="Cambria" pitchFamily="34" charset="-120"/>
+              </a:rPr>
+              <a:t>—</a:t>
+            </a:r>
+            <a:endParaRPr lang="en-US" sz="5000" dirty="0"/>
+          </a:p>
+        </p:txBody>
+      </p:sp>
+      <p:sp>
+        <p:nvSpPr>
+          <p:cNvPr id="18" name="Text 16"/>
+          <p:cNvSpPr txBox="1"/>
+          <p:nvPr/>
+        </p:nvSpPr>
+        <p:spPr>
+          <a:xfrm>
+            <a:off x="6583680" y="4023360"/>
+            <a:ext cx="3383280" cy="365760"/>
+          </a:xfrm>
+          <a:prstGeom prst="rect">
+            <a:avLst/>
+          </a:prstGeom>
+          <a:noFill/>
+          <a:ln/>
+        </p:spPr>
+        <p:txBody>
+          <a:bodyPr wrap="square" lIns="0" tIns="0" rIns="0" bIns="0" rtlCol="0" anchor="ctr"/>
+          <a:lstStyle/>
+          <a:p>
+            <a:pPr indent="0" marL="0">
+              <a:buNone/>
+            </a:pPr>
+            <a:r>
+              <a:rPr lang="en-US" sz="1350" dirty="0">
+                <a:solidFill>
+                  <a:srgbClr val="6A7278"/>
+                </a:solidFill>
+                <a:latin typeface="Calibri" pitchFamily="34" charset="0"/>
+                <a:ea typeface="Calibri" pitchFamily="34" charset="-122"/>
+                <a:cs typeface="Calibri" pitchFamily="34" charset="-120"/>
+              </a:rPr>
+              <a:t>Teacher acquisition</a:t>
+            </a:r>
+            <a:endParaRPr lang="en-US" sz="1350" dirty="0"/>
+          </a:p>
+        </p:txBody>
+      </p:sp>
+      <p:sp>
+        <p:nvSpPr>
+          <p:cNvPr id="19" name="Text 17"/>
+          <p:cNvSpPr txBox="1"/>
+          <p:nvPr/>
+        </p:nvSpPr>
+        <p:spPr>
+          <a:xfrm>
+            <a:off x="9966960" y="4023360"/>
+            <a:ext cx="1188720" cy="365760"/>
+          </a:xfrm>
+          <a:prstGeom prst="rect">
+            <a:avLst/>
+          </a:prstGeom>
+          <a:noFill/>
+          <a:ln/>
+        </p:spPr>
+        <p:txBody>
+          <a:bodyPr wrap="square" lIns="0" tIns="0" rIns="0" bIns="0" rtlCol="0" anchor="ctr"/>
+          <a:lstStyle/>
+          <a:p>
+            <a:pPr algn="r" indent="0" marL="0">
+              <a:buNone/>
+            </a:pPr>
+            <a:r>
+              <a:rPr lang="en-US" sz="1500" b="1" dirty="0">
                 <a:solidFill>
                   <a:srgbClr val="0D1B2A"/>
                 </a:solidFill>
@@ -3316,22 +3520,22 @@
                 <a:ea typeface="Calibri" pitchFamily="34" charset="-122"/>
                 <a:cs typeface="Calibri" pitchFamily="34" charset="-120"/>
               </a:rPr>
-              <a:t>YOUR NUMBERS GO HERE</a:t>
-            </a:r>
-            <a:endParaRPr lang="en-US" sz="1050" dirty="0"/>
-          </a:p>
-        </p:txBody>
-      </p:sp>
-      <p:sp>
-        <p:nvSpPr>
-          <p:cNvPr id="13" name="Text 11"/>
-          <p:cNvSpPr txBox="1"/>
-          <p:nvPr/>
-        </p:nvSpPr>
-        <p:spPr>
-          <a:xfrm>
-            <a:off x="6583680" y="3017520"/>
-            <a:ext cx="4572000" cy="2011680"/>
+              <a:t>—</a:t>
+            </a:r>
+            <a:endParaRPr lang="en-US" sz="1500" dirty="0"/>
+          </a:p>
+        </p:txBody>
+      </p:sp>
+      <p:sp>
+        <p:nvSpPr>
+          <p:cNvPr id="20" name="Text 18"/>
+          <p:cNvSpPr txBox="1"/>
+          <p:nvPr/>
+        </p:nvSpPr>
+        <p:spPr>
+          <a:xfrm>
+            <a:off x="6583680" y="4663440"/>
+            <a:ext cx="3383280" cy="365760"/>
           </a:xfrm>
           <a:prstGeom prst="rect">
             <a:avLst/>
@@ -3343,15 +3547,50 @@
           <a:bodyPr wrap="square" lIns="0" tIns="0" rIns="0" bIns="0" rtlCol="0" anchor="ctr"/>
           <a:lstStyle/>
           <a:p>
-            <a:pPr marL="342900" indent="-342900">
-              <a:spcAft>
-                <a:spcPts val="800"/>
-              </a:spcAft>
-              <a:buSzPct val="100000"/>
-              <a:buChar char="•"/>
-            </a:pPr>
-            <a:r>
-              <a:rPr lang="en-US" sz="1300" dirty="0">
+            <a:pPr indent="0" marL="0">
+              <a:buNone/>
+            </a:pPr>
+            <a:r>
+              <a:rPr lang="en-US" sz="1350" dirty="0">
+                <a:solidFill>
+                  <a:srgbClr val="6A7278"/>
+                </a:solidFill>
+                <a:latin typeface="Calibri" pitchFamily="34" charset="0"/>
+                <a:ea typeface="Calibri" pitchFamily="34" charset="-122"/>
+                <a:cs typeface="Calibri" pitchFamily="34" charset="-120"/>
+              </a:rPr>
+              <a:t>Engineering</a:t>
+            </a:r>
+            <a:endParaRPr lang="en-US" sz="1350" dirty="0"/>
+          </a:p>
+        </p:txBody>
+      </p:sp>
+      <p:sp>
+        <p:nvSpPr>
+          <p:cNvPr id="21" name="Text 19"/>
+          <p:cNvSpPr txBox="1"/>
+          <p:nvPr/>
+        </p:nvSpPr>
+        <p:spPr>
+          <a:xfrm>
+            <a:off x="9966960" y="4663440"/>
+            <a:ext cx="1188720" cy="365760"/>
+          </a:xfrm>
+          <a:prstGeom prst="rect">
+            <a:avLst/>
+          </a:prstGeom>
+          <a:noFill/>
+          <a:ln/>
+        </p:spPr>
+        <p:txBody>
+          <a:bodyPr wrap="square" lIns="0" tIns="0" rIns="0" bIns="0" rtlCol="0" anchor="ctr"/>
+          <a:lstStyle/>
+          <a:p>
+            <a:pPr algn="r" indent="0" marL="0">
+              <a:buNone/>
+            </a:pPr>
+            <a:r>
+              <a:rPr lang="en-US" sz="1500" b="1" dirty="0">
                 <a:solidFill>
                   <a:srgbClr val="0D1B2A"/>
                 </a:solidFill>
@@ -3359,20 +3598,77 @@
                 <a:ea typeface="Calibri" pitchFamily="34" charset="-122"/>
                 <a:cs typeface="Calibri" pitchFamily="34" charset="-120"/>
               </a:rPr>
-              <a:t>Amount, and the runway it buys in months</a:t>
-            </a:r>
-            <a:endParaRPr lang="en-US" sz="1300" dirty="0"/>
-          </a:p>
-          <a:p>
-            <a:pPr marL="342900" indent="-342900">
-              <a:spcAft>
-                <a:spcPts val="800"/>
-              </a:spcAft>
-              <a:buSzPct val="100000"/>
-              <a:buChar char="•"/>
-            </a:pPr>
-            <a:r>
-              <a:rPr lang="en-US" sz="1300" dirty="0">
+              <a:t>—</a:t>
+            </a:r>
+            <a:endParaRPr lang="en-US" sz="1500" dirty="0"/>
+          </a:p>
+        </p:txBody>
+      </p:sp>
+      <p:sp>
+        <p:nvSpPr>
+          <p:cNvPr id="22" name="Text 20"/>
+          <p:cNvSpPr txBox="1"/>
+          <p:nvPr/>
+        </p:nvSpPr>
+        <p:spPr>
+          <a:xfrm>
+            <a:off x="6583680" y="5303520"/>
+            <a:ext cx="3383280" cy="365760"/>
+          </a:xfrm>
+          <a:prstGeom prst="rect">
+            <a:avLst/>
+          </a:prstGeom>
+          <a:noFill/>
+          <a:ln/>
+        </p:spPr>
+        <p:txBody>
+          <a:bodyPr wrap="square" lIns="0" tIns="0" rIns="0" bIns="0" rtlCol="0" anchor="ctr"/>
+          <a:lstStyle/>
+          <a:p>
+            <a:pPr indent="0" marL="0">
+              <a:buNone/>
+            </a:pPr>
+            <a:r>
+              <a:rPr lang="en-US" sz="1350" dirty="0">
+                <a:solidFill>
+                  <a:srgbClr val="6A7278"/>
+                </a:solidFill>
+                <a:latin typeface="Calibri" pitchFamily="34" charset="0"/>
+                <a:ea typeface="Calibri" pitchFamily="34" charset="-122"/>
+                <a:cs typeface="Calibri" pitchFamily="34" charset="-120"/>
+              </a:rPr>
+              <a:t>Compliance and operations</a:t>
+            </a:r>
+            <a:endParaRPr lang="en-US" sz="1350" dirty="0"/>
+          </a:p>
+        </p:txBody>
+      </p:sp>
+      <p:sp>
+        <p:nvSpPr>
+          <p:cNvPr id="23" name="Text 21"/>
+          <p:cNvSpPr txBox="1"/>
+          <p:nvPr/>
+        </p:nvSpPr>
+        <p:spPr>
+          <a:xfrm>
+            <a:off x="9966960" y="5303520"/>
+            <a:ext cx="1188720" cy="365760"/>
+          </a:xfrm>
+          <a:prstGeom prst="rect">
+            <a:avLst/>
+          </a:prstGeom>
+          <a:noFill/>
+          <a:ln/>
+        </p:spPr>
+        <p:txBody>
+          <a:bodyPr wrap="square" lIns="0" tIns="0" rIns="0" bIns="0" rtlCol="0" anchor="ctr"/>
+          <a:lstStyle/>
+          <a:p>
+            <a:pPr algn="r" indent="0" marL="0">
+              <a:buNone/>
+            </a:pPr>
+            <a:r>
+              <a:rPr lang="en-US" sz="1500" b="1" dirty="0">
                 <a:solidFill>
                   <a:srgbClr val="0D1B2A"/>
                 </a:solidFill>
@@ -3380,69 +3676,9 @@
                 <a:ea typeface="Calibri" pitchFamily="34" charset="-122"/>
                 <a:cs typeface="Calibri" pitchFamily="34" charset="-120"/>
               </a:rPr>
-              <a:t>The split — teacher acquisition, engineering, compliance</a:t>
-            </a:r>
-            <a:endParaRPr lang="en-US" sz="1300" dirty="0"/>
-          </a:p>
-          <a:p>
-            <a:pPr marL="342900" indent="-342900">
-              <a:spcAft>
-                <a:spcPts val="800"/>
-              </a:spcAft>
-              <a:buSzPct val="100000"/>
-              <a:buChar char="•"/>
-            </a:pPr>
-            <a:r>
-              <a:rPr lang="en-US" sz="1300" dirty="0">
-                <a:solidFill>
-                  <a:srgbClr val="0D1B2A"/>
-                </a:solidFill>
-                <a:latin typeface="Calibri" pitchFamily="34" charset="0"/>
-                <a:ea typeface="Calibri" pitchFamily="34" charset="-122"/>
-                <a:cs typeface="Calibri" pitchFamily="34" charset="-120"/>
-              </a:rPr>
-              <a:t>The milestone it reaches: the number that makes the next round obvious</a:t>
-            </a:r>
-            <a:endParaRPr lang="en-US" sz="1300" dirty="0"/>
-          </a:p>
-        </p:txBody>
-      </p:sp>
-      <p:sp>
-        <p:nvSpPr>
-          <p:cNvPr id="14" name="Text 12"/>
-          <p:cNvSpPr txBox="1"/>
-          <p:nvPr/>
-        </p:nvSpPr>
-        <p:spPr>
-          <a:xfrm>
-            <a:off x="640080" y="5897880"/>
-            <a:ext cx="10881360" cy="548640"/>
-          </a:xfrm>
-          <a:prstGeom prst="rect">
-            <a:avLst/>
-          </a:prstGeom>
-          <a:noFill/>
-          <a:ln/>
-        </p:spPr>
-        <p:txBody>
-          <a:bodyPr wrap="square" rtlCol="0" anchor="ctr"/>
-          <a:lstStyle/>
-          <a:p>
-            <a:pPr indent="0" marL="0">
-              <a:buNone/>
-            </a:pPr>
-            <a:r>
-              <a:rPr lang="en-US" sz="1300" i="1" dirty="0">
-                <a:solidFill>
-                  <a:srgbClr val="6A7278"/>
-                </a:solidFill>
-                <a:latin typeface="Calibri" pitchFamily="34" charset="0"/>
-                <a:ea typeface="Calibri" pitchFamily="34" charset="-122"/>
-                <a:cs typeface="Calibri" pitchFamily="34" charset="-120"/>
-              </a:rPr>
-              <a:t>Frame the raise as buying a specific proof, not a period of time. "Enough to get 50 teachers earning" lands better than "18 months of runway".</a:t>
-            </a:r>
-            <a:endParaRPr lang="en-US" sz="1300" dirty="0"/>
+              <a:t>—</a:t>
+            </a:r>
+            <a:endParaRPr lang="en-US" sz="1500" dirty="0"/>
           </a:p>
         </p:txBody>
       </p:sp>
@@ -3580,45 +3816,6 @@
           </a:p>
         </p:txBody>
       </p:sp>
-      <p:sp>
-        <p:nvSpPr>
-          <p:cNvPr id="5" name="Text 2"/>
-          <p:cNvSpPr txBox="1"/>
-          <p:nvPr/>
-        </p:nvSpPr>
-        <p:spPr>
-          <a:xfrm>
-            <a:off x="914400" y="5669280"/>
-            <a:ext cx="10332720" cy="365760"/>
-          </a:xfrm>
-          <a:prstGeom prst="rect">
-            <a:avLst/>
-          </a:prstGeom>
-          <a:noFill/>
-          <a:ln/>
-        </p:spPr>
-        <p:txBody>
-          <a:bodyPr wrap="square" rtlCol="0" anchor="ctr"/>
-          <a:lstStyle/>
-          <a:p>
-            <a:pPr algn="ctr" indent="0" marL="0">
-              <a:buNone/>
-            </a:pPr>
-            <a:r>
-              <a:rPr lang="en-US" sz="1300" dirty="0">
-                <a:solidFill>
-                  <a:srgbClr val="CFE7DC"/>
-                </a:solidFill>
-                <a:latin typeface="Calibri" pitchFamily="34" charset="0"/>
-                <a:ea typeface="Calibri" pitchFamily="34" charset="-122"/>
-                <a:cs typeface="Calibri" pitchFamily="34" charset="-120"/>
-              </a:rPr>
-              <a:t>Contact details here</a:t>
-            </a:r>
-            <a:endParaRPr lang="en-US" sz="1300" dirty="0"/>
-          </a:p>
-        </p:txBody>
-      </p:sp>
     </p:spTree>
   </p:cSld>
   <p:clrMapOvr>
@@ -4854,7 +5051,7 @@
                 <a:ea typeface="Calibri" pitchFamily="34" charset="-122"/>
                 <a:cs typeface="Calibri" pitchFamily="34" charset="-120"/>
               </a:rPr>
-              <a:t>Sizing must come from sources you can defend in the room.</a:t>
+              <a:t>Sized bottom-up: teachers onboarded, courses published, average sale.</a:t>
             </a:r>
             <a:endParaRPr lang="en-US" sz="1500" dirty="0"/>
           </a:p>
@@ -4869,76 +5066,15 @@
         <p:spPr>
           <a:xfrm>
             <a:off x="640080" y="1783080"/>
-            <a:ext cx="2971800" cy="310896"/>
+            <a:ext cx="3383280" cy="3566160"/>
           </a:xfrm>
           <a:prstGeom prst="roundRect">
             <a:avLst>
-              <a:gd name="adj" fmla="val 50000"/>
+              <a:gd name="adj" fmla="val 2703"/>
             </a:avLst>
           </a:prstGeom>
           <a:solidFill>
-            <a:srgbClr val="E8A33D"/>
-          </a:solidFill>
-          <a:ln/>
-        </p:spPr>
-      </p:sp>
-      <p:sp>
-        <p:nvSpPr>
-          <p:cNvPr id="5" name="Text 3"/>
-          <p:cNvSpPr txBox="1"/>
-          <p:nvPr/>
-        </p:nvSpPr>
-        <p:spPr>
-          <a:xfrm>
-            <a:off x="640080" y="1783080"/>
-            <a:ext cx="2971800" cy="310896"/>
-          </a:xfrm>
-          <a:prstGeom prst="rect">
-            <a:avLst/>
-          </a:prstGeom>
-          <a:noFill/>
-          <a:ln/>
-        </p:spPr>
-        <p:txBody>
-          <a:bodyPr wrap="square" lIns="0" tIns="0" rIns="0" bIns="0" rtlCol="0" anchor="ctr"/>
-          <a:lstStyle/>
-          <a:p>
-            <a:pPr algn="ctr" indent="0" marL="0">
-              <a:buNone/>
-            </a:pPr>
-            <a:r>
-              <a:rPr lang="en-US" sz="1050" b="1" dirty="0">
-                <a:solidFill>
-                  <a:srgbClr val="0D1B2A"/>
-                </a:solidFill>
-                <a:latin typeface="Calibri" pitchFamily="34" charset="0"/>
-                <a:ea typeface="Calibri" pitchFamily="34" charset="-122"/>
-                <a:cs typeface="Calibri" pitchFamily="34" charset="-120"/>
-              </a:rPr>
-              <a:t>YOUR NUMBERS GO HERE</a:t>
-            </a:r>
-            <a:endParaRPr lang="en-US" sz="1050" dirty="0"/>
-          </a:p>
-        </p:txBody>
-      </p:sp>
-      <p:sp>
-        <p:nvSpPr>
-          <p:cNvPr id="6" name="Shape 4"/>
-          <p:cNvSpPr/>
-          <p:nvPr/>
-        </p:nvSpPr>
-        <p:spPr>
-          <a:xfrm>
-            <a:off x="640080" y="2286000"/>
-            <a:ext cx="10881360" cy="3566160"/>
-          </a:xfrm>
-          <a:prstGeom prst="roundRect">
-            <a:avLst>
-              <a:gd name="adj" fmla="val 2564"/>
-            </a:avLst>
-          </a:prstGeom>
-          <a:solidFill>
-            <a:srgbClr val="F7F9F8"/>
+            <a:srgbClr val="E6F2ED"/>
           </a:solidFill>
           <a:ln/>
           <a:effectLst>
@@ -4952,14 +5088,92 @@
       </p:sp>
       <p:sp>
         <p:nvSpPr>
+          <p:cNvPr id="5" name="Text 3"/>
+          <p:cNvSpPr txBox="1"/>
+          <p:nvPr/>
+        </p:nvSpPr>
+        <p:spPr>
+          <a:xfrm>
+            <a:off x="960120" y="2075688"/>
+            <a:ext cx="2743200" cy="365760"/>
+          </a:xfrm>
+          <a:prstGeom prst="rect">
+            <a:avLst/>
+          </a:prstGeom>
+          <a:noFill/>
+          <a:ln/>
+        </p:spPr>
+        <p:txBody>
+          <a:bodyPr wrap="square" lIns="0" tIns="0" rIns="0" bIns="0" rtlCol="0" anchor="ctr"/>
+          <a:lstStyle/>
+          <a:p>
+            <a:pPr indent="0" marL="0">
+              <a:buNone/>
+            </a:pPr>
+            <a:r>
+              <a:rPr lang="en-US" sz="1150" b="1" spc="100" kern="0" dirty="0">
+                <a:solidFill>
+                  <a:srgbClr val="236B50"/>
+                </a:solidFill>
+                <a:latin typeface="Calibri" pitchFamily="34" charset="0"/>
+                <a:ea typeface="Calibri" pitchFamily="34" charset="-122"/>
+                <a:cs typeface="Calibri" pitchFamily="34" charset="-120"/>
+              </a:rPr>
+              <a:t>TOTAL ADDRESSABLE</a:t>
+            </a:r>
+            <a:endParaRPr lang="en-US" sz="1150" dirty="0"/>
+          </a:p>
+        </p:txBody>
+      </p:sp>
+      <p:sp>
+        <p:nvSpPr>
+          <p:cNvPr id="6" name="Text 4"/>
+          <p:cNvSpPr txBox="1"/>
+          <p:nvPr/>
+        </p:nvSpPr>
+        <p:spPr>
+          <a:xfrm>
+            <a:off x="960120" y="2514600"/>
+            <a:ext cx="2743200" cy="960120"/>
+          </a:xfrm>
+          <a:prstGeom prst="rect">
+            <a:avLst/>
+          </a:prstGeom>
+          <a:noFill/>
+          <a:ln/>
+        </p:spPr>
+        <p:txBody>
+          <a:bodyPr wrap="square" lIns="0" tIns="0" rIns="0" bIns="0" rtlCol="0" anchor="ctr"/>
+          <a:lstStyle/>
+          <a:p>
+            <a:pPr indent="0" marL="0">
+              <a:buNone/>
+            </a:pPr>
+            <a:r>
+              <a:rPr lang="en-US" sz="5400" b="1" dirty="0">
+                <a:solidFill>
+                  <a:srgbClr val="0D1B2A"/>
+                </a:solidFill>
+                <a:latin typeface="Cambria" pitchFamily="34" charset="0"/>
+                <a:ea typeface="Cambria" pitchFamily="34" charset="-122"/>
+                <a:cs typeface="Cambria" pitchFamily="34" charset="-120"/>
+              </a:rPr>
+              <a:t>—</a:t>
+            </a:r>
+            <a:endParaRPr lang="en-US" sz="5400" dirty="0"/>
+          </a:p>
+        </p:txBody>
+      </p:sp>
+      <p:sp>
+        <p:nvSpPr>
           <p:cNvPr id="7" name="Text 5"/>
           <p:cNvSpPr txBox="1"/>
           <p:nvPr/>
         </p:nvSpPr>
         <p:spPr>
           <a:xfrm>
-            <a:off x="1005840" y="2514600"/>
-            <a:ext cx="10149840" cy="365760"/>
+            <a:off x="960120" y="3611880"/>
+            <a:ext cx="2743200" cy="1463040"/>
           </a:xfrm>
           <a:prstGeom prst="rect">
             <a:avLst/>
@@ -4972,33 +5186,143 @@
           <a:lstStyle/>
           <a:p>
             <a:pPr indent="0" marL="0">
-              <a:buNone/>
-            </a:pPr>
-            <a:r>
-              <a:rPr lang="en-US" sz="1600" b="1" dirty="0">
+              <a:lnSpc>
+                <a:spcPct val="130000"/>
+              </a:lnSpc>
+              <a:buNone/>
+            </a:pPr>
+            <a:r>
+              <a:rPr lang="en-US" sz="1300" dirty="0">
+                <a:solidFill>
+                  <a:srgbClr val="6A7278"/>
+                </a:solidFill>
+                <a:latin typeface="Calibri" pitchFamily="34" charset="0"/>
+                <a:ea typeface="Calibri" pitchFamily="34" charset="-122"/>
+                <a:cs typeface="Calibri" pitchFamily="34" charset="-120"/>
+              </a:rPr>
+              <a:t>Nigerians paying for structured learning in any form today</a:t>
+            </a:r>
+            <a:endParaRPr lang="en-US" sz="1300" dirty="0"/>
+          </a:p>
+        </p:txBody>
+      </p:sp>
+      <p:sp>
+        <p:nvSpPr>
+          <p:cNvPr id="8" name="Shape 6"/>
+          <p:cNvSpPr/>
+          <p:nvPr/>
+        </p:nvSpPr>
+        <p:spPr>
+          <a:xfrm>
+            <a:off x="4343400" y="1783080"/>
+            <a:ext cx="3383280" cy="3566160"/>
+          </a:xfrm>
+          <a:prstGeom prst="roundRect">
+            <a:avLst>
+              <a:gd name="adj" fmla="val 2703"/>
+            </a:avLst>
+          </a:prstGeom>
+          <a:solidFill>
+            <a:srgbClr val="F7F9F8"/>
+          </a:solidFill>
+          <a:ln/>
+          <a:effectLst>
+            <a:outerShdw sx="100000" sy="100000" kx="0" ky="0" algn="bl" rotWithShape="0" blurRad="127000" dist="25400" dir="5400000">
+              <a:srgbClr val="000000">
+                <a:alpha val="8000"/>
+              </a:srgbClr>
+            </a:outerShdw>
+          </a:effectLst>
+        </p:spPr>
+      </p:sp>
+      <p:sp>
+        <p:nvSpPr>
+          <p:cNvPr id="9" name="Text 7"/>
+          <p:cNvSpPr txBox="1"/>
+          <p:nvPr/>
+        </p:nvSpPr>
+        <p:spPr>
+          <a:xfrm>
+            <a:off x="4663440" y="2075688"/>
+            <a:ext cx="2743200" cy="365760"/>
+          </a:xfrm>
+          <a:prstGeom prst="rect">
+            <a:avLst/>
+          </a:prstGeom>
+          <a:noFill/>
+          <a:ln/>
+        </p:spPr>
+        <p:txBody>
+          <a:bodyPr wrap="square" lIns="0" tIns="0" rIns="0" bIns="0" rtlCol="0" anchor="ctr"/>
+          <a:lstStyle/>
+          <a:p>
+            <a:pPr indent="0" marL="0">
+              <a:buNone/>
+            </a:pPr>
+            <a:r>
+              <a:rPr lang="en-US" sz="1150" b="1" spc="100" kern="0" dirty="0">
+                <a:solidFill>
+                  <a:srgbClr val="236B50"/>
+                </a:solidFill>
+                <a:latin typeface="Calibri" pitchFamily="34" charset="0"/>
+                <a:ea typeface="Calibri" pitchFamily="34" charset="-122"/>
+                <a:cs typeface="Calibri" pitchFamily="34" charset="-120"/>
+              </a:rPr>
+              <a:t>SERVICEABLE</a:t>
+            </a:r>
+            <a:endParaRPr lang="en-US" sz="1150" dirty="0"/>
+          </a:p>
+        </p:txBody>
+      </p:sp>
+      <p:sp>
+        <p:nvSpPr>
+          <p:cNvPr id="10" name="Text 8"/>
+          <p:cNvSpPr txBox="1"/>
+          <p:nvPr/>
+        </p:nvSpPr>
+        <p:spPr>
+          <a:xfrm>
+            <a:off x="4663440" y="2514600"/>
+            <a:ext cx="2743200" cy="960120"/>
+          </a:xfrm>
+          <a:prstGeom prst="rect">
+            <a:avLst/>
+          </a:prstGeom>
+          <a:noFill/>
+          <a:ln/>
+        </p:spPr>
+        <p:txBody>
+          <a:bodyPr wrap="square" lIns="0" tIns="0" rIns="0" bIns="0" rtlCol="0" anchor="ctr"/>
+          <a:lstStyle/>
+          <a:p>
+            <a:pPr indent="0" marL="0">
+              <a:buNone/>
+            </a:pPr>
+            <a:r>
+              <a:rPr lang="en-US" sz="5400" b="1" dirty="0">
                 <a:solidFill>
                   <a:srgbClr val="0D1B2A"/>
                 </a:solidFill>
-                <a:latin typeface="Calibri" pitchFamily="34" charset="0"/>
-                <a:ea typeface="Calibri" pitchFamily="34" charset="-122"/>
-                <a:cs typeface="Calibri" pitchFamily="34" charset="-120"/>
-              </a:rPr>
-              <a:t>What belongs here</a:t>
-            </a:r>
-            <a:endParaRPr lang="en-US" sz="1600" dirty="0"/>
-          </a:p>
-        </p:txBody>
-      </p:sp>
-      <p:sp>
-        <p:nvSpPr>
-          <p:cNvPr id="8" name="Text 6"/>
-          <p:cNvSpPr txBox="1"/>
-          <p:nvPr/>
-        </p:nvSpPr>
-        <p:spPr>
-          <a:xfrm>
-            <a:off x="1005840" y="2971800"/>
-            <a:ext cx="10058400" cy="2286000"/>
+                <a:latin typeface="Cambria" pitchFamily="34" charset="0"/>
+                <a:ea typeface="Cambria" pitchFamily="34" charset="-122"/>
+                <a:cs typeface="Cambria" pitchFamily="34" charset="-120"/>
+              </a:rPr>
+              <a:t>—</a:t>
+            </a:r>
+            <a:endParaRPr lang="en-US" sz="5400" dirty="0"/>
+          </a:p>
+        </p:txBody>
+      </p:sp>
+      <p:sp>
+        <p:nvSpPr>
+          <p:cNvPr id="11" name="Text 9"/>
+          <p:cNvSpPr txBox="1"/>
+          <p:nvPr/>
+        </p:nvSpPr>
+        <p:spPr>
+          <a:xfrm>
+            <a:off x="4663440" y="3611880"/>
+            <a:ext cx="2743200" cy="1463040"/>
           </a:xfrm>
           <a:prstGeom prst="rect">
             <a:avLst/>
@@ -5010,117 +5334,163 @@
           <a:bodyPr wrap="square" lIns="0" tIns="0" rIns="0" bIns="0" rtlCol="0" anchor="ctr"/>
           <a:lstStyle/>
           <a:p>
-            <a:pPr marL="342900" indent="-342900">
-              <a:spcAft>
-                <a:spcPts val="1000"/>
-              </a:spcAft>
-              <a:buSzPct val="100000"/>
-              <a:buChar char="•"/>
-            </a:pPr>
-            <a:r>
-              <a:rPr lang="en-US" sz="1350" dirty="0">
+            <a:pPr indent="0" marL="0">
+              <a:lnSpc>
+                <a:spcPct val="130000"/>
+              </a:lnSpc>
+              <a:buNone/>
+            </a:pPr>
+            <a:r>
+              <a:rPr lang="en-US" sz="1300" dirty="0">
+                <a:solidFill>
+                  <a:srgbClr val="6A7278"/>
+                </a:solidFill>
+                <a:latin typeface="Calibri" pitchFamily="34" charset="0"/>
+                <a:ea typeface="Calibri" pitchFamily="34" charset="-122"/>
+                <a:cs typeface="Calibri" pitchFamily="34" charset="-120"/>
+              </a:rPr>
+              <a:t>Smartphone users with a means of digital payment</a:t>
+            </a:r>
+            <a:endParaRPr lang="en-US" sz="1300" dirty="0"/>
+          </a:p>
+        </p:txBody>
+      </p:sp>
+      <p:sp>
+        <p:nvSpPr>
+          <p:cNvPr id="12" name="Shape 10"/>
+          <p:cNvSpPr/>
+          <p:nvPr/>
+        </p:nvSpPr>
+        <p:spPr>
+          <a:xfrm>
+            <a:off x="8046720" y="1783080"/>
+            <a:ext cx="3383280" cy="3566160"/>
+          </a:xfrm>
+          <a:prstGeom prst="roundRect">
+            <a:avLst>
+              <a:gd name="adj" fmla="val 2703"/>
+            </a:avLst>
+          </a:prstGeom>
+          <a:solidFill>
+            <a:srgbClr val="F7F9F8"/>
+          </a:solidFill>
+          <a:ln/>
+          <a:effectLst>
+            <a:outerShdw sx="100000" sy="100000" kx="0" ky="0" algn="bl" rotWithShape="0" blurRad="127000" dist="25400" dir="5400000">
+              <a:srgbClr val="000000">
+                <a:alpha val="8000"/>
+              </a:srgbClr>
+            </a:outerShdw>
+          </a:effectLst>
+        </p:spPr>
+      </p:sp>
+      <p:sp>
+        <p:nvSpPr>
+          <p:cNvPr id="13" name="Text 11"/>
+          <p:cNvSpPr txBox="1"/>
+          <p:nvPr/>
+        </p:nvSpPr>
+        <p:spPr>
+          <a:xfrm>
+            <a:off x="8366760" y="2075688"/>
+            <a:ext cx="2743200" cy="365760"/>
+          </a:xfrm>
+          <a:prstGeom prst="rect">
+            <a:avLst/>
+          </a:prstGeom>
+          <a:noFill/>
+          <a:ln/>
+        </p:spPr>
+        <p:txBody>
+          <a:bodyPr wrap="square" lIns="0" tIns="0" rIns="0" bIns="0" rtlCol="0" anchor="ctr"/>
+          <a:lstStyle/>
+          <a:p>
+            <a:pPr indent="0" marL="0">
+              <a:buNone/>
+            </a:pPr>
+            <a:r>
+              <a:rPr lang="en-US" sz="1150" b="1" spc="100" kern="0" dirty="0">
+                <a:solidFill>
+                  <a:srgbClr val="236B50"/>
+                </a:solidFill>
+                <a:latin typeface="Calibri" pitchFamily="34" charset="0"/>
+                <a:ea typeface="Calibri" pitchFamily="34" charset="-122"/>
+                <a:cs typeface="Calibri" pitchFamily="34" charset="-120"/>
+              </a:rPr>
+              <a:t>OBTAINABLE, YEAR THREE</a:t>
+            </a:r>
+            <a:endParaRPr lang="en-US" sz="1150" dirty="0"/>
+          </a:p>
+        </p:txBody>
+      </p:sp>
+      <p:sp>
+        <p:nvSpPr>
+          <p:cNvPr id="14" name="Text 12"/>
+          <p:cNvSpPr txBox="1"/>
+          <p:nvPr/>
+        </p:nvSpPr>
+        <p:spPr>
+          <a:xfrm>
+            <a:off x="8366760" y="2514600"/>
+            <a:ext cx="2743200" cy="960120"/>
+          </a:xfrm>
+          <a:prstGeom prst="rect">
+            <a:avLst/>
+          </a:prstGeom>
+          <a:noFill/>
+          <a:ln/>
+        </p:spPr>
+        <p:txBody>
+          <a:bodyPr wrap="square" lIns="0" tIns="0" rIns="0" bIns="0" rtlCol="0" anchor="ctr"/>
+          <a:lstStyle/>
+          <a:p>
+            <a:pPr indent="0" marL="0">
+              <a:buNone/>
+            </a:pPr>
+            <a:r>
+              <a:rPr lang="en-US" sz="5400" b="1" dirty="0">
                 <a:solidFill>
                   <a:srgbClr val="0D1B2A"/>
                 </a:solidFill>
-                <a:latin typeface="Calibri" pitchFamily="34" charset="0"/>
-                <a:ea typeface="Calibri" pitchFamily="34" charset="-122"/>
-                <a:cs typeface="Calibri" pitchFamily="34" charset="-120"/>
-              </a:rPr>
-              <a:t>TAM — Nigerians paying for any form of paid learning today, with the source cited</a:t>
-            </a:r>
-            <a:endParaRPr lang="en-US" sz="1350" dirty="0"/>
-          </a:p>
-          <a:p>
-            <a:pPr marL="342900" indent="-342900">
-              <a:spcAft>
-                <a:spcPts val="1000"/>
-              </a:spcAft>
-              <a:buSzPct val="100000"/>
-              <a:buChar char="•"/>
-            </a:pPr>
-            <a:r>
-              <a:rPr lang="en-US" sz="1350" dirty="0">
-                <a:solidFill>
-                  <a:srgbClr val="0D1B2A"/>
-                </a:solidFill>
-                <a:latin typeface="Calibri" pitchFamily="34" charset="0"/>
-                <a:ea typeface="Calibri" pitchFamily="34" charset="-122"/>
-                <a:cs typeface="Calibri" pitchFamily="34" charset="-120"/>
-              </a:rPr>
-              <a:t>SAM — those reachable on a smartphone with a means of digital payment</a:t>
-            </a:r>
-            <a:endParaRPr lang="en-US" sz="1350" dirty="0"/>
-          </a:p>
-          <a:p>
-            <a:pPr marL="342900" indent="-342900">
-              <a:spcAft>
-                <a:spcPts val="1000"/>
-              </a:spcAft>
-              <a:buSzPct val="100000"/>
-              <a:buChar char="•"/>
-            </a:pPr>
-            <a:r>
-              <a:rPr lang="en-US" sz="1350" dirty="0">
-                <a:solidFill>
-                  <a:srgbClr val="0D1B2A"/>
-                </a:solidFill>
-                <a:latin typeface="Calibri" pitchFamily="34" charset="0"/>
-                <a:ea typeface="Calibri" pitchFamily="34" charset="-122"/>
-                <a:cs typeface="Calibri" pitchFamily="34" charset="-120"/>
-              </a:rPr>
-              <a:t>SOM — a defensible three-year share, built bottom-up from teachers onboarded × courses × average price</a:t>
-            </a:r>
-            <a:endParaRPr lang="en-US" sz="1350" dirty="0"/>
-          </a:p>
-          <a:p>
-            <a:pPr marL="342900" indent="-342900">
-              <a:spcAft>
-                <a:spcPts val="1000"/>
-              </a:spcAft>
-              <a:buSzPct val="100000"/>
-              <a:buChar char="•"/>
-            </a:pPr>
-            <a:r>
-              <a:rPr lang="en-US" sz="1350" dirty="0">
-                <a:solidFill>
-                  <a:srgbClr val="0D1B2A"/>
-                </a:solidFill>
-                <a:latin typeface="Calibri" pitchFamily="34" charset="0"/>
-                <a:ea typeface="Calibri" pitchFamily="34" charset="-122"/>
-                <a:cs typeface="Calibri" pitchFamily="34" charset="-120"/>
-              </a:rPr>
-              <a:t>Adjacent proof points — what the market already spends on exam prep, and on informal skills training</a:t>
-            </a:r>
-            <a:endParaRPr lang="en-US" sz="1350" dirty="0"/>
-          </a:p>
-        </p:txBody>
-      </p:sp>
-      <p:sp>
-        <p:nvSpPr>
-          <p:cNvPr id="9" name="Text 7"/>
-          <p:cNvSpPr txBox="1"/>
-          <p:nvPr/>
-        </p:nvSpPr>
-        <p:spPr>
-          <a:xfrm>
-            <a:off x="640080" y="6080760"/>
-            <a:ext cx="10881360" cy="548640"/>
-          </a:xfrm>
-          <a:prstGeom prst="rect">
-            <a:avLst/>
-          </a:prstGeom>
-          <a:noFill/>
-          <a:ln/>
-        </p:spPr>
-        <p:txBody>
-          <a:bodyPr wrap="square" rtlCol="0" anchor="ctr"/>
+                <a:latin typeface="Cambria" pitchFamily="34" charset="0"/>
+                <a:ea typeface="Cambria" pitchFamily="34" charset="-122"/>
+                <a:cs typeface="Cambria" pitchFamily="34" charset="-120"/>
+              </a:rPr>
+              <a:t>—</a:t>
+            </a:r>
+            <a:endParaRPr lang="en-US" sz="5400" dirty="0"/>
+          </a:p>
+        </p:txBody>
+      </p:sp>
+      <p:sp>
+        <p:nvSpPr>
+          <p:cNvPr id="15" name="Text 13"/>
+          <p:cNvSpPr txBox="1"/>
+          <p:nvPr/>
+        </p:nvSpPr>
+        <p:spPr>
+          <a:xfrm>
+            <a:off x="8366760" y="3611880"/>
+            <a:ext cx="2743200" cy="1463040"/>
+          </a:xfrm>
+          <a:prstGeom prst="rect">
+            <a:avLst/>
+          </a:prstGeom>
+          <a:noFill/>
+          <a:ln/>
+        </p:spPr>
+        <p:txBody>
+          <a:bodyPr wrap="square" lIns="0" tIns="0" rIns="0" bIns="0" rtlCol="0" anchor="ctr"/>
           <a:lstStyle/>
           <a:p>
             <a:pPr indent="0" marL="0">
-              <a:buNone/>
-            </a:pPr>
-            <a:r>
-              <a:rPr lang="en-US" sz="1300" i="1" dirty="0">
+              <a:lnSpc>
+                <a:spcPct val="130000"/>
+              </a:lnSpc>
+              <a:buNone/>
+            </a:pPr>
+            <a:r>
+              <a:rPr lang="en-US" sz="1300" dirty="0">
                 <a:solidFill>
                   <a:srgbClr val="6A7278"/>
                 </a:solidFill>
@@ -5128,7 +5498,7 @@
                 <a:ea typeface="Calibri" pitchFamily="34" charset="-122"/>
                 <a:cs typeface="Calibri" pitchFamily="34" charset="-120"/>
               </a:rPr>
-              <a:t>Build the bottom-up number first and lead with it. A large top-down TAM invites scepticism; a defensible bottom-up model invites the next question.</a:t>
+              <a:t>Teachers onboarded x courses published x average sale value</a:t>
             </a:r>
             <a:endParaRPr lang="en-US" sz="1300" dirty="0"/>
           </a:p>
@@ -5688,7 +6058,7 @@
                 <a:ea typeface="Calibri" pitchFamily="34" charset="-122"/>
                 <a:cs typeface="Calibri" pitchFamily="34" charset="-120"/>
               </a:rPr>
-              <a:t>Later lines — promoted placement, cohort courses, certification — are deliberately not in this model.</a:t>
+              <a:t>Promoted placement, cohort courses and certification are potential future lines, and are excluded from these figures.</a:t>
             </a:r>
             <a:endParaRPr lang="en-US" sz="1300" dirty="0"/>
           </a:p>
@@ -5791,7 +6161,7 @@
                 <a:ea typeface="Calibri" pitchFamily="34" charset="-122"/>
                 <a:cs typeface="Calibri" pitchFamily="34" charset="-120"/>
               </a:rPr>
-              <a:t>The revenue side is known. The cost side is yours to fill.</a:t>
+              <a:t>Revenue per sale is fixed by the model. Acquisition is the variable.</a:t>
             </a:r>
             <a:endParaRPr lang="en-US" sz="1500" dirty="0"/>
           </a:p>
@@ -5851,7 +6221,7 @@
               <a:buNone/>
             </a:pPr>
             <a:r>
-              <a:rPr lang="en-US" sz="1600" b="1" dirty="0">
+              <a:rPr lang="en-US" sz="1700" b="1" dirty="0">
                 <a:solidFill>
                   <a:srgbClr val="236B50"/>
                 </a:solidFill>
@@ -5859,9 +6229,9 @@
                 <a:ea typeface="Calibri" pitchFamily="34" charset="-122"/>
                 <a:cs typeface="Calibri" pitchFamily="34" charset="-120"/>
               </a:rPr>
-              <a:t>Known</a:t>
-            </a:r>
-            <a:endParaRPr lang="en-US" sz="1600" dirty="0"/>
+              <a:t>Per sale</a:t>
+            </a:r>
+            <a:endParaRPr lang="en-US" sz="1700" dirty="0"/>
           </a:p>
         </p:txBody>
       </p:sp>
@@ -5873,8 +6243,8 @@
         </p:nvSpPr>
         <p:spPr>
           <a:xfrm>
-            <a:off x="1005840" y="2560320"/>
-            <a:ext cx="4572000" cy="2560320"/>
+            <a:off x="1005840" y="2606040"/>
+            <a:ext cx="4572000" cy="2926080"/>
           </a:xfrm>
           <a:prstGeom prst="rect">
             <a:avLst/>
@@ -5888,13 +6258,13 @@
           <a:p>
             <a:pPr marL="342900" indent="-342900">
               <a:spcAft>
-                <a:spcPts val="800"/>
+                <a:spcPts val="1000"/>
               </a:spcAft>
               <a:buSzPct val="100000"/>
               <a:buChar char="•"/>
             </a:pPr>
             <a:r>
-              <a:rPr lang="en-US" sz="1300" dirty="0">
+              <a:rPr lang="en-US" sz="1350" dirty="0">
                 <a:solidFill>
                   <a:srgbClr val="0D1B2A"/>
                 </a:solidFill>
@@ -5902,20 +6272,20 @@
                 <a:ea typeface="Calibri" pitchFamily="34" charset="-122"/>
                 <a:cs typeface="Calibri" pitchFamily="34" charset="-120"/>
               </a:rPr>
-              <a:t>Revenue per sale: 15% of settled amount</a:t>
-            </a:r>
-            <a:endParaRPr lang="en-US" sz="1300" dirty="0"/>
+              <a:t>Revenue: 15% of the settled amount</a:t>
+            </a:r>
+            <a:endParaRPr lang="en-US" sz="1350" dirty="0"/>
           </a:p>
           <a:p>
             <a:pPr marL="342900" indent="-342900">
               <a:spcAft>
-                <a:spcPts val="800"/>
+                <a:spcPts val="1000"/>
               </a:spcAft>
               <a:buSzPct val="100000"/>
               <a:buChar char="•"/>
             </a:pPr>
             <a:r>
-              <a:rPr lang="en-US" sz="1300" dirty="0">
+              <a:rPr lang="en-US" sz="1350" dirty="0">
                 <a:solidFill>
                   <a:srgbClr val="0D1B2A"/>
                 </a:solidFill>
@@ -5923,20 +6293,20 @@
                 <a:ea typeface="Calibri" pitchFamily="34" charset="-122"/>
                 <a:cs typeface="Calibri" pitchFamily="34" charset="-120"/>
               </a:rPr>
-              <a:t>Processing: 1.5%, plus ₦100 above ₦2,500, capped at ₦2,000</a:t>
-            </a:r>
-            <a:endParaRPr lang="en-US" sz="1300" dirty="0"/>
+              <a:t>Processing: 1.5%, plus N100 above N2,500, capped at N2,000</a:t>
+            </a:r>
+            <a:endParaRPr lang="en-US" sz="1350" dirty="0"/>
           </a:p>
           <a:p>
             <a:pPr marL="342900" indent="-342900">
               <a:spcAft>
-                <a:spcPts val="800"/>
+                <a:spcPts val="1000"/>
               </a:spcAft>
               <a:buSzPct val="100000"/>
               <a:buChar char="•"/>
             </a:pPr>
             <a:r>
-              <a:rPr lang="en-US" sz="1300" dirty="0">
+              <a:rPr lang="en-US" sz="1350" dirty="0">
                 <a:solidFill>
                   <a:srgbClr val="0D1B2A"/>
                 </a:solidFill>
@@ -5944,20 +6314,20 @@
                 <a:ea typeface="Calibri" pitchFamily="34" charset="-122"/>
                 <a:cs typeface="Calibri" pitchFamily="34" charset="-120"/>
               </a:rPr>
-              <a:t>Marginal hosting cost per enrolment is close to zero</a:t>
-            </a:r>
-            <a:endParaRPr lang="en-US" sz="1300" dirty="0"/>
+              <a:t>Marginal hosting cost per enrolment near zero</a:t>
+            </a:r>
+            <a:endParaRPr lang="en-US" sz="1350" dirty="0"/>
           </a:p>
           <a:p>
             <a:pPr marL="342900" indent="-342900">
               <a:spcAft>
-                <a:spcPts val="800"/>
+                <a:spcPts val="1000"/>
               </a:spcAft>
               <a:buSzPct val="100000"/>
               <a:buChar char="•"/>
             </a:pPr>
             <a:r>
-              <a:rPr lang="en-US" sz="1300" dirty="0">
+              <a:rPr lang="en-US" sz="1350" dirty="0">
                 <a:solidFill>
                   <a:srgbClr val="0D1B2A"/>
                 </a:solidFill>
@@ -5967,7 +6337,7 @@
               </a:rPr>
               <a:t>No cost of goods — teachers supply the content</a:t>
             </a:r>
-            <a:endParaRPr lang="en-US" sz="1300" dirty="0"/>
+            <a:endParaRPr lang="en-US" sz="1350" dirty="0"/>
           </a:p>
         </p:txBody>
       </p:sp>
@@ -6002,25 +6372,42 @@
       </p:sp>
       <p:sp>
         <p:nvSpPr>
-          <p:cNvPr id="8" name="Shape 6"/>
-          <p:cNvSpPr/>
-          <p:nvPr/>
-        </p:nvSpPr>
-        <p:spPr>
-          <a:xfrm>
-            <a:off x="6583680" y="2039112"/>
-            <a:ext cx="2971800" cy="310896"/>
-          </a:xfrm>
-          <a:prstGeom prst="roundRect">
-            <a:avLst>
-              <a:gd name="adj" fmla="val 50000"/>
-            </a:avLst>
-          </a:prstGeom>
-          <a:solidFill>
-            <a:srgbClr val="E8A33D"/>
-          </a:solidFill>
-          <a:ln/>
-        </p:spPr>
+          <p:cNvPr id="8" name="Text 6"/>
+          <p:cNvSpPr txBox="1"/>
+          <p:nvPr/>
+        </p:nvSpPr>
+        <p:spPr>
+          <a:xfrm>
+            <a:off x="6583680" y="2057400"/>
+            <a:ext cx="4572000" cy="365760"/>
+          </a:xfrm>
+          <a:prstGeom prst="rect">
+            <a:avLst/>
+          </a:prstGeom>
+          <a:noFill/>
+          <a:ln/>
+        </p:spPr>
+        <p:txBody>
+          <a:bodyPr wrap="square" lIns="0" tIns="0" rIns="0" bIns="0" rtlCol="0" anchor="ctr"/>
+          <a:lstStyle/>
+          <a:p>
+            <a:pPr indent="0" marL="0">
+              <a:buNone/>
+            </a:pPr>
+            <a:r>
+              <a:rPr lang="en-US" sz="1700" b="1" dirty="0">
+                <a:solidFill>
+                  <a:srgbClr val="0D1B2A"/>
+                </a:solidFill>
+                <a:latin typeface="Calibri" pitchFamily="34" charset="0"/>
+                <a:ea typeface="Calibri" pitchFamily="34" charset="-122"/>
+                <a:cs typeface="Calibri" pitchFamily="34" charset="-120"/>
+              </a:rPr>
+              <a:t>Per customer</a:t>
+            </a:r>
+            <a:endParaRPr lang="en-US" sz="1700" dirty="0"/>
+          </a:p>
+        </p:txBody>
       </p:sp>
       <p:sp>
         <p:nvSpPr>
@@ -6030,8 +6417,8 @@
         </p:nvSpPr>
         <p:spPr>
           <a:xfrm>
-            <a:off x="6583680" y="2039112"/>
-            <a:ext cx="2971800" cy="310896"/>
+            <a:off x="6583680" y="2651760"/>
+            <a:ext cx="3383280" cy="365760"/>
           </a:xfrm>
           <a:prstGeom prst="rect">
             <a:avLst/>
@@ -6043,11 +6430,50 @@
           <a:bodyPr wrap="square" lIns="0" tIns="0" rIns="0" bIns="0" rtlCol="0" anchor="ctr"/>
           <a:lstStyle/>
           <a:p>
-            <a:pPr algn="ctr" indent="0" marL="0">
-              <a:buNone/>
-            </a:pPr>
-            <a:r>
-              <a:rPr lang="en-US" sz="1050" b="1" dirty="0">
+            <a:pPr indent="0" marL="0">
+              <a:buNone/>
+            </a:pPr>
+            <a:r>
+              <a:rPr lang="en-US" sz="1350" dirty="0">
+                <a:solidFill>
+                  <a:srgbClr val="6A7278"/>
+                </a:solidFill>
+                <a:latin typeface="Calibri" pitchFamily="34" charset="0"/>
+                <a:ea typeface="Calibri" pitchFamily="34" charset="-122"/>
+                <a:cs typeface="Calibri" pitchFamily="34" charset="-120"/>
+              </a:rPr>
+              <a:t>Acquisition cost, learner</a:t>
+            </a:r>
+            <a:endParaRPr lang="en-US" sz="1350" dirty="0"/>
+          </a:p>
+        </p:txBody>
+      </p:sp>
+      <p:sp>
+        <p:nvSpPr>
+          <p:cNvPr id="10" name="Text 8"/>
+          <p:cNvSpPr txBox="1"/>
+          <p:nvPr/>
+        </p:nvSpPr>
+        <p:spPr>
+          <a:xfrm>
+            <a:off x="9966960" y="2651760"/>
+            <a:ext cx="1188720" cy="365760"/>
+          </a:xfrm>
+          <a:prstGeom prst="rect">
+            <a:avLst/>
+          </a:prstGeom>
+          <a:noFill/>
+          <a:ln/>
+        </p:spPr>
+        <p:txBody>
+          <a:bodyPr wrap="square" lIns="0" tIns="0" rIns="0" bIns="0" rtlCol="0" anchor="ctr"/>
+          <a:lstStyle/>
+          <a:p>
+            <a:pPr algn="r" indent="0" marL="0">
+              <a:buNone/>
+            </a:pPr>
+            <a:r>
+              <a:rPr lang="en-US" sz="1500" b="1" dirty="0">
                 <a:solidFill>
                   <a:srgbClr val="0D1B2A"/>
                 </a:solidFill>
@@ -6055,22 +6481,22 @@
                 <a:ea typeface="Calibri" pitchFamily="34" charset="-122"/>
                 <a:cs typeface="Calibri" pitchFamily="34" charset="-120"/>
               </a:rPr>
-              <a:t>YOUR NUMBERS GO HERE</a:t>
-            </a:r>
-            <a:endParaRPr lang="en-US" sz="1050" dirty="0"/>
-          </a:p>
-        </p:txBody>
-      </p:sp>
-      <p:sp>
-        <p:nvSpPr>
-          <p:cNvPr id="10" name="Text 8"/>
-          <p:cNvSpPr txBox="1"/>
-          <p:nvPr/>
-        </p:nvSpPr>
-        <p:spPr>
-          <a:xfrm>
-            <a:off x="6583680" y="2560320"/>
-            <a:ext cx="4572000" cy="2560320"/>
+              <a:t>—</a:t>
+            </a:r>
+            <a:endParaRPr lang="en-US" sz="1500" dirty="0"/>
+          </a:p>
+        </p:txBody>
+      </p:sp>
+      <p:sp>
+        <p:nvSpPr>
+          <p:cNvPr id="11" name="Text 9"/>
+          <p:cNvSpPr txBox="1"/>
+          <p:nvPr/>
+        </p:nvSpPr>
+        <p:spPr>
+          <a:xfrm>
+            <a:off x="6583680" y="3236976"/>
+            <a:ext cx="3383280" cy="365760"/>
           </a:xfrm>
           <a:prstGeom prst="rect">
             <a:avLst/>
@@ -6082,15 +6508,50 @@
           <a:bodyPr wrap="square" lIns="0" tIns="0" rIns="0" bIns="0" rtlCol="0" anchor="ctr"/>
           <a:lstStyle/>
           <a:p>
-            <a:pPr marL="342900" indent="-342900">
-              <a:spcAft>
-                <a:spcPts val="800"/>
-              </a:spcAft>
-              <a:buSzPct val="100000"/>
-              <a:buChar char="•"/>
-            </a:pPr>
-            <a:r>
-              <a:rPr lang="en-US" sz="1300" dirty="0">
+            <a:pPr indent="0" marL="0">
+              <a:buNone/>
+            </a:pPr>
+            <a:r>
+              <a:rPr lang="en-US" sz="1350" dirty="0">
+                <a:solidFill>
+                  <a:srgbClr val="6A7278"/>
+                </a:solidFill>
+                <a:latin typeface="Calibri" pitchFamily="34" charset="0"/>
+                <a:ea typeface="Calibri" pitchFamily="34" charset="-122"/>
+                <a:cs typeface="Calibri" pitchFamily="34" charset="-120"/>
+              </a:rPr>
+              <a:t>Acquisition cost, teacher</a:t>
+            </a:r>
+            <a:endParaRPr lang="en-US" sz="1350" dirty="0"/>
+          </a:p>
+        </p:txBody>
+      </p:sp>
+      <p:sp>
+        <p:nvSpPr>
+          <p:cNvPr id="12" name="Text 10"/>
+          <p:cNvSpPr txBox="1"/>
+          <p:nvPr/>
+        </p:nvSpPr>
+        <p:spPr>
+          <a:xfrm>
+            <a:off x="9966960" y="3236976"/>
+            <a:ext cx="1188720" cy="365760"/>
+          </a:xfrm>
+          <a:prstGeom prst="rect">
+            <a:avLst/>
+          </a:prstGeom>
+          <a:noFill/>
+          <a:ln/>
+        </p:spPr>
+        <p:txBody>
+          <a:bodyPr wrap="square" lIns="0" tIns="0" rIns="0" bIns="0" rtlCol="0" anchor="ctr"/>
+          <a:lstStyle/>
+          <a:p>
+            <a:pPr algn="r" indent="0" marL="0">
+              <a:buNone/>
+            </a:pPr>
+            <a:r>
+              <a:rPr lang="en-US" sz="1500" b="1" dirty="0">
                 <a:solidFill>
                   <a:srgbClr val="0D1B2A"/>
                 </a:solidFill>
@@ -6098,20 +6559,77 @@
                 <a:ea typeface="Calibri" pitchFamily="34" charset="-122"/>
                 <a:cs typeface="Calibri" pitchFamily="34" charset="-120"/>
               </a:rPr>
-              <a:t>CAC — per learner and per teacher, which will differ sharply</a:t>
-            </a:r>
-            <a:endParaRPr lang="en-US" sz="1300" dirty="0"/>
-          </a:p>
-          <a:p>
-            <a:pPr marL="342900" indent="-342900">
-              <a:spcAft>
-                <a:spcPts val="800"/>
-              </a:spcAft>
-              <a:buSzPct val="100000"/>
-              <a:buChar char="•"/>
-            </a:pPr>
-            <a:r>
-              <a:rPr lang="en-US" sz="1300" dirty="0">
+              <a:t>—</a:t>
+            </a:r>
+            <a:endParaRPr lang="en-US" sz="1500" dirty="0"/>
+          </a:p>
+        </p:txBody>
+      </p:sp>
+      <p:sp>
+        <p:nvSpPr>
+          <p:cNvPr id="13" name="Text 11"/>
+          <p:cNvSpPr txBox="1"/>
+          <p:nvPr/>
+        </p:nvSpPr>
+        <p:spPr>
+          <a:xfrm>
+            <a:off x="6583680" y="3822192"/>
+            <a:ext cx="3383280" cy="365760"/>
+          </a:xfrm>
+          <a:prstGeom prst="rect">
+            <a:avLst/>
+          </a:prstGeom>
+          <a:noFill/>
+          <a:ln/>
+        </p:spPr>
+        <p:txBody>
+          <a:bodyPr wrap="square" lIns="0" tIns="0" rIns="0" bIns="0" rtlCol="0" anchor="ctr"/>
+          <a:lstStyle/>
+          <a:p>
+            <a:pPr indent="0" marL="0">
+              <a:buNone/>
+            </a:pPr>
+            <a:r>
+              <a:rPr lang="en-US" sz="1350" dirty="0">
+                <a:solidFill>
+                  <a:srgbClr val="6A7278"/>
+                </a:solidFill>
+                <a:latin typeface="Calibri" pitchFamily="34" charset="0"/>
+                <a:ea typeface="Calibri" pitchFamily="34" charset="-122"/>
+                <a:cs typeface="Calibri" pitchFamily="34" charset="-120"/>
+              </a:rPr>
+              <a:t>Average order value</a:t>
+            </a:r>
+            <a:endParaRPr lang="en-US" sz="1350" dirty="0"/>
+          </a:p>
+        </p:txBody>
+      </p:sp>
+      <p:sp>
+        <p:nvSpPr>
+          <p:cNvPr id="14" name="Text 12"/>
+          <p:cNvSpPr txBox="1"/>
+          <p:nvPr/>
+        </p:nvSpPr>
+        <p:spPr>
+          <a:xfrm>
+            <a:off x="9966960" y="3822192"/>
+            <a:ext cx="1188720" cy="365760"/>
+          </a:xfrm>
+          <a:prstGeom prst="rect">
+            <a:avLst/>
+          </a:prstGeom>
+          <a:noFill/>
+          <a:ln/>
+        </p:spPr>
+        <p:txBody>
+          <a:bodyPr wrap="square" lIns="0" tIns="0" rIns="0" bIns="0" rtlCol="0" anchor="ctr"/>
+          <a:lstStyle/>
+          <a:p>
+            <a:pPr algn="r" indent="0" marL="0">
+              <a:buNone/>
+            </a:pPr>
+            <a:r>
+              <a:rPr lang="en-US" sz="1500" b="1" dirty="0">
                 <a:solidFill>
                   <a:srgbClr val="0D1B2A"/>
                 </a:solidFill>
@@ -6119,20 +6637,77 @@
                 <a:ea typeface="Calibri" pitchFamily="34" charset="-122"/>
                 <a:cs typeface="Calibri" pitchFamily="34" charset="-120"/>
               </a:rPr>
-              <a:t>Average order value, and repeat purchase rate</a:t>
-            </a:r>
-            <a:endParaRPr lang="en-US" sz="1300" dirty="0"/>
-          </a:p>
-          <a:p>
-            <a:pPr marL="342900" indent="-342900">
-              <a:spcAft>
-                <a:spcPts val="800"/>
-              </a:spcAft>
-              <a:buSzPct val="100000"/>
-              <a:buChar char="•"/>
-            </a:pPr>
-            <a:r>
-              <a:rPr lang="en-US" sz="1300" dirty="0">
+              <a:t>—</a:t>
+            </a:r>
+            <a:endParaRPr lang="en-US" sz="1500" dirty="0"/>
+          </a:p>
+        </p:txBody>
+      </p:sp>
+      <p:sp>
+        <p:nvSpPr>
+          <p:cNvPr id="15" name="Text 13"/>
+          <p:cNvSpPr txBox="1"/>
+          <p:nvPr/>
+        </p:nvSpPr>
+        <p:spPr>
+          <a:xfrm>
+            <a:off x="6583680" y="4407408"/>
+            <a:ext cx="3383280" cy="365760"/>
+          </a:xfrm>
+          <a:prstGeom prst="rect">
+            <a:avLst/>
+          </a:prstGeom>
+          <a:noFill/>
+          <a:ln/>
+        </p:spPr>
+        <p:txBody>
+          <a:bodyPr wrap="square" lIns="0" tIns="0" rIns="0" bIns="0" rtlCol="0" anchor="ctr"/>
+          <a:lstStyle/>
+          <a:p>
+            <a:pPr indent="0" marL="0">
+              <a:buNone/>
+            </a:pPr>
+            <a:r>
+              <a:rPr lang="en-US" sz="1350" dirty="0">
+                <a:solidFill>
+                  <a:srgbClr val="6A7278"/>
+                </a:solidFill>
+                <a:latin typeface="Calibri" pitchFamily="34" charset="0"/>
+                <a:ea typeface="Calibri" pitchFamily="34" charset="-122"/>
+                <a:cs typeface="Calibri" pitchFamily="34" charset="-120"/>
+              </a:rPr>
+              <a:t>Repeat purchase rate</a:t>
+            </a:r>
+            <a:endParaRPr lang="en-US" sz="1350" dirty="0"/>
+          </a:p>
+        </p:txBody>
+      </p:sp>
+      <p:sp>
+        <p:nvSpPr>
+          <p:cNvPr id="16" name="Text 14"/>
+          <p:cNvSpPr txBox="1"/>
+          <p:nvPr/>
+        </p:nvSpPr>
+        <p:spPr>
+          <a:xfrm>
+            <a:off x="9966960" y="4407408"/>
+            <a:ext cx="1188720" cy="365760"/>
+          </a:xfrm>
+          <a:prstGeom prst="rect">
+            <a:avLst/>
+          </a:prstGeom>
+          <a:noFill/>
+          <a:ln/>
+        </p:spPr>
+        <p:txBody>
+          <a:bodyPr wrap="square" lIns="0" tIns="0" rIns="0" bIns="0" rtlCol="0" anchor="ctr"/>
+          <a:lstStyle/>
+          <a:p>
+            <a:pPr algn="r" indent="0" marL="0">
+              <a:buNone/>
+            </a:pPr>
+            <a:r>
+              <a:rPr lang="en-US" sz="1500" b="1" dirty="0">
                 <a:solidFill>
                   <a:srgbClr val="0D1B2A"/>
                 </a:solidFill>
@@ -6140,20 +6715,77 @@
                 <a:ea typeface="Calibri" pitchFamily="34" charset="-122"/>
                 <a:cs typeface="Calibri" pitchFamily="34" charset="-120"/>
               </a:rPr>
-              <a:t>Teacher retention — how many publish a second course</a:t>
-            </a:r>
-            <a:endParaRPr lang="en-US" sz="1300" dirty="0"/>
-          </a:p>
-          <a:p>
-            <a:pPr marL="342900" indent="-342900">
-              <a:spcAft>
-                <a:spcPts val="800"/>
-              </a:spcAft>
-              <a:buSzPct val="100000"/>
-              <a:buChar char="•"/>
-            </a:pPr>
-            <a:r>
-              <a:rPr lang="en-US" sz="1300" dirty="0">
+              <a:t>—</a:t>
+            </a:r>
+            <a:endParaRPr lang="en-US" sz="1500" dirty="0"/>
+          </a:p>
+        </p:txBody>
+      </p:sp>
+      <p:sp>
+        <p:nvSpPr>
+          <p:cNvPr id="17" name="Text 15"/>
+          <p:cNvSpPr txBox="1"/>
+          <p:nvPr/>
+        </p:nvSpPr>
+        <p:spPr>
+          <a:xfrm>
+            <a:off x="6583680" y="4992624"/>
+            <a:ext cx="3383280" cy="365760"/>
+          </a:xfrm>
+          <a:prstGeom prst="rect">
+            <a:avLst/>
+          </a:prstGeom>
+          <a:noFill/>
+          <a:ln/>
+        </p:spPr>
+        <p:txBody>
+          <a:bodyPr wrap="square" lIns="0" tIns="0" rIns="0" bIns="0" rtlCol="0" anchor="ctr"/>
+          <a:lstStyle/>
+          <a:p>
+            <a:pPr indent="0" marL="0">
+              <a:buNone/>
+            </a:pPr>
+            <a:r>
+              <a:rPr lang="en-US" sz="1350" dirty="0">
+                <a:solidFill>
+                  <a:srgbClr val="6A7278"/>
+                </a:solidFill>
+                <a:latin typeface="Calibri" pitchFamily="34" charset="0"/>
+                <a:ea typeface="Calibri" pitchFamily="34" charset="-122"/>
+                <a:cs typeface="Calibri" pitchFamily="34" charset="-120"/>
+              </a:rPr>
+              <a:t>LTV to CAC</a:t>
+            </a:r>
+            <a:endParaRPr lang="en-US" sz="1350" dirty="0"/>
+          </a:p>
+        </p:txBody>
+      </p:sp>
+      <p:sp>
+        <p:nvSpPr>
+          <p:cNvPr id="18" name="Text 16"/>
+          <p:cNvSpPr txBox="1"/>
+          <p:nvPr/>
+        </p:nvSpPr>
+        <p:spPr>
+          <a:xfrm>
+            <a:off x="9966960" y="4992624"/>
+            <a:ext cx="1188720" cy="365760"/>
+          </a:xfrm>
+          <a:prstGeom prst="rect">
+            <a:avLst/>
+          </a:prstGeom>
+          <a:noFill/>
+          <a:ln/>
+        </p:spPr>
+        <p:txBody>
+          <a:bodyPr wrap="square" lIns="0" tIns="0" rIns="0" bIns="0" rtlCol="0" anchor="ctr"/>
+          <a:lstStyle/>
+          <a:p>
+            <a:pPr algn="r" indent="0" marL="0">
+              <a:buNone/>
+            </a:pPr>
+            <a:r>
+              <a:rPr lang="en-US" sz="1500" b="1" dirty="0">
                 <a:solidFill>
                   <a:srgbClr val="0D1B2A"/>
                 </a:solidFill>
@@ -6161,48 +6793,9 @@
                 <a:ea typeface="Calibri" pitchFamily="34" charset="-122"/>
                 <a:cs typeface="Calibri" pitchFamily="34" charset="-120"/>
               </a:rPr>
-              <a:t>Payback period, and LTV/CAC</a:t>
-            </a:r>
-            <a:endParaRPr lang="en-US" sz="1300" dirty="0"/>
-          </a:p>
-        </p:txBody>
-      </p:sp>
-      <p:sp>
-        <p:nvSpPr>
-          <p:cNvPr id="11" name="Text 9"/>
-          <p:cNvSpPr txBox="1"/>
-          <p:nvPr/>
-        </p:nvSpPr>
-        <p:spPr>
-          <a:xfrm>
-            <a:off x="640080" y="5989320"/>
-            <a:ext cx="10881360" cy="640080"/>
-          </a:xfrm>
-          <a:prstGeom prst="rect">
-            <a:avLst/>
-          </a:prstGeom>
-          <a:noFill/>
-          <a:ln/>
-        </p:spPr>
-        <p:txBody>
-          <a:bodyPr wrap="square" rtlCol="0" anchor="ctr"/>
-          <a:lstStyle/>
-          <a:p>
-            <a:pPr indent="0" marL="0">
-              <a:buNone/>
-            </a:pPr>
-            <a:r>
-              <a:rPr lang="en-US" sz="1300" i="1" dirty="0">
-                <a:solidFill>
-                  <a:srgbClr val="6A7278"/>
-                </a:solidFill>
-                <a:latin typeface="Calibri" pitchFamily="34" charset="0"/>
-                <a:ea typeface="Calibri" pitchFamily="34" charset="-122"/>
-                <a:cs typeface="Calibri" pitchFamily="34" charset="-120"/>
-              </a:rPr>
-              <a:t>Teacher acquisition is the number that decides this business. One teacher who brings their own students is worth many paid learner installs — if that holds, say so with evidence.</a:t>
-            </a:r>
-            <a:endParaRPr lang="en-US" sz="1300" dirty="0"/>
+              <a:t>—</a:t>
+            </a:r>
+            <a:endParaRPr lang="en-US" sz="1500" dirty="0"/>
           </a:p>
         </p:txBody>
       </p:sp>
@@ -6966,7 +7559,7 @@
                 <a:ea typeface="Calibri" pitchFamily="34" charset="-122"/>
                 <a:cs typeface="Calibri" pitchFamily="34" charset="-120"/>
               </a:rPr>
-              <a:t>Currently pre-launch. This slide is the one investors read first.</a:t>
+              <a:t>Pre-launch. Product built end to end; first cohort in preparation.</a:t>
             </a:r>
             <a:endParaRPr lang="en-US" sz="1500" dirty="0"/>
           </a:p>
@@ -6981,76 +7574,15 @@
         <p:spPr>
           <a:xfrm>
             <a:off x="640080" y="1783080"/>
-            <a:ext cx="2971800" cy="310896"/>
+            <a:ext cx="2514600" cy="2286000"/>
           </a:xfrm>
           <a:prstGeom prst="roundRect">
             <a:avLst>
-              <a:gd name="adj" fmla="val 50000"/>
+              <a:gd name="adj" fmla="val 4000"/>
             </a:avLst>
           </a:prstGeom>
           <a:solidFill>
-            <a:srgbClr val="E8A33D"/>
-          </a:solidFill>
-          <a:ln/>
-        </p:spPr>
-      </p:sp>
-      <p:sp>
-        <p:nvSpPr>
-          <p:cNvPr id="5" name="Text 3"/>
-          <p:cNvSpPr txBox="1"/>
-          <p:nvPr/>
-        </p:nvSpPr>
-        <p:spPr>
-          <a:xfrm>
-            <a:off x="640080" y="1783080"/>
-            <a:ext cx="2971800" cy="310896"/>
-          </a:xfrm>
-          <a:prstGeom prst="rect">
-            <a:avLst/>
-          </a:prstGeom>
-          <a:noFill/>
-          <a:ln/>
-        </p:spPr>
-        <p:txBody>
-          <a:bodyPr wrap="square" lIns="0" tIns="0" rIns="0" bIns="0" rtlCol="0" anchor="ctr"/>
-          <a:lstStyle/>
-          <a:p>
-            <a:pPr algn="ctr" indent="0" marL="0">
-              <a:buNone/>
-            </a:pPr>
-            <a:r>
-              <a:rPr lang="en-US" sz="1050" b="1" dirty="0">
-                <a:solidFill>
-                  <a:srgbClr val="0D1B2A"/>
-                </a:solidFill>
-                <a:latin typeface="Calibri" pitchFamily="34" charset="0"/>
-                <a:ea typeface="Calibri" pitchFamily="34" charset="-122"/>
-                <a:cs typeface="Calibri" pitchFamily="34" charset="-120"/>
-              </a:rPr>
-              <a:t>YOUR NUMBERS GO HERE</a:t>
-            </a:r>
-            <a:endParaRPr lang="en-US" sz="1050" dirty="0"/>
-          </a:p>
-        </p:txBody>
-      </p:sp>
-      <p:sp>
-        <p:nvSpPr>
-          <p:cNvPr id="6" name="Shape 4"/>
-          <p:cNvSpPr/>
-          <p:nvPr/>
-        </p:nvSpPr>
-        <p:spPr>
-          <a:xfrm>
-            <a:off x="640080" y="2286000"/>
-            <a:ext cx="10881360" cy="3383280"/>
-          </a:xfrm>
-          <a:prstGeom prst="roundRect">
-            <a:avLst>
-              <a:gd name="adj" fmla="val 2703"/>
-            </a:avLst>
-          </a:prstGeom>
-          <a:solidFill>
-            <a:srgbClr val="F7F9F8"/>
+            <a:srgbClr val="E6F2ED"/>
           </a:solidFill>
           <a:ln/>
           <a:effectLst>
@@ -7064,13 +7596,453 @@
       </p:sp>
       <p:sp>
         <p:nvSpPr>
-          <p:cNvPr id="7" name="Text 5"/>
-          <p:cNvSpPr txBox="1"/>
-          <p:nvPr/>
-        </p:nvSpPr>
-        <p:spPr>
-          <a:xfrm>
-            <a:off x="1005840" y="2514600"/>
+          <p:cNvPr id="5" name="Text 3"/>
+          <p:cNvSpPr txBox="1"/>
+          <p:nvPr/>
+        </p:nvSpPr>
+        <p:spPr>
+          <a:xfrm>
+            <a:off x="914400" y="2167128"/>
+            <a:ext cx="1965960" cy="914400"/>
+          </a:xfrm>
+          <a:prstGeom prst="rect">
+            <a:avLst/>
+          </a:prstGeom>
+          <a:noFill/>
+          <a:ln/>
+        </p:spPr>
+        <p:txBody>
+          <a:bodyPr wrap="square" lIns="0" tIns="0" rIns="0" bIns="0" rtlCol="0" anchor="ctr"/>
+          <a:lstStyle/>
+          <a:p>
+            <a:pPr indent="0" marL="0">
+              <a:buNone/>
+            </a:pPr>
+            <a:r>
+              <a:rPr lang="en-US" sz="4800" b="1" dirty="0">
+                <a:solidFill>
+                  <a:srgbClr val="0D1B2A"/>
+                </a:solidFill>
+                <a:latin typeface="Cambria" pitchFamily="34" charset="0"/>
+                <a:ea typeface="Cambria" pitchFamily="34" charset="-122"/>
+                <a:cs typeface="Cambria" pitchFamily="34" charset="-120"/>
+              </a:rPr>
+              <a:t>—</a:t>
+            </a:r>
+            <a:endParaRPr lang="en-US" sz="4800" dirty="0"/>
+          </a:p>
+        </p:txBody>
+      </p:sp>
+      <p:sp>
+        <p:nvSpPr>
+          <p:cNvPr id="6" name="Text 4"/>
+          <p:cNvSpPr txBox="1"/>
+          <p:nvPr/>
+        </p:nvSpPr>
+        <p:spPr>
+          <a:xfrm>
+            <a:off x="914400" y="3154680"/>
+            <a:ext cx="1965960" cy="731520"/>
+          </a:xfrm>
+          <a:prstGeom prst="rect">
+            <a:avLst/>
+          </a:prstGeom>
+          <a:noFill/>
+          <a:ln/>
+        </p:spPr>
+        <p:txBody>
+          <a:bodyPr wrap="square" lIns="0" tIns="0" rIns="0" bIns="0" rtlCol="0" anchor="ctr"/>
+          <a:lstStyle/>
+          <a:p>
+            <a:pPr indent="0" marL="0">
+              <a:lnSpc>
+                <a:spcPct val="120000"/>
+              </a:lnSpc>
+              <a:buNone/>
+            </a:pPr>
+            <a:r>
+              <a:rPr lang="en-US" sz="1300" dirty="0">
+                <a:solidFill>
+                  <a:srgbClr val="6A7278"/>
+                </a:solidFill>
+                <a:latin typeface="Calibri" pitchFamily="34" charset="0"/>
+                <a:ea typeface="Calibri" pitchFamily="34" charset="-122"/>
+                <a:cs typeface="Calibri" pitchFamily="34" charset="-120"/>
+              </a:rPr>
+              <a:t>Teachers committed</a:t>
+            </a:r>
+            <a:endParaRPr lang="en-US" sz="1300" dirty="0"/>
+          </a:p>
+        </p:txBody>
+      </p:sp>
+      <p:sp>
+        <p:nvSpPr>
+          <p:cNvPr id="7" name="Shape 5"/>
+          <p:cNvSpPr/>
+          <p:nvPr/>
+        </p:nvSpPr>
+        <p:spPr>
+          <a:xfrm>
+            <a:off x="3410712" y="1783080"/>
+            <a:ext cx="2514600" cy="2286000"/>
+          </a:xfrm>
+          <a:prstGeom prst="roundRect">
+            <a:avLst>
+              <a:gd name="adj" fmla="val 4000"/>
+            </a:avLst>
+          </a:prstGeom>
+          <a:solidFill>
+            <a:srgbClr val="F7F9F8"/>
+          </a:solidFill>
+          <a:ln/>
+          <a:effectLst>
+            <a:outerShdw sx="100000" sy="100000" kx="0" ky="0" algn="bl" rotWithShape="0" blurRad="127000" dist="25400" dir="5400000">
+              <a:srgbClr val="000000">
+                <a:alpha val="8000"/>
+              </a:srgbClr>
+            </a:outerShdw>
+          </a:effectLst>
+        </p:spPr>
+      </p:sp>
+      <p:sp>
+        <p:nvSpPr>
+          <p:cNvPr id="8" name="Text 6"/>
+          <p:cNvSpPr txBox="1"/>
+          <p:nvPr/>
+        </p:nvSpPr>
+        <p:spPr>
+          <a:xfrm>
+            <a:off x="3685032" y="2167128"/>
+            <a:ext cx="1965960" cy="914400"/>
+          </a:xfrm>
+          <a:prstGeom prst="rect">
+            <a:avLst/>
+          </a:prstGeom>
+          <a:noFill/>
+          <a:ln/>
+        </p:spPr>
+        <p:txBody>
+          <a:bodyPr wrap="square" lIns="0" tIns="0" rIns="0" bIns="0" rtlCol="0" anchor="ctr"/>
+          <a:lstStyle/>
+          <a:p>
+            <a:pPr indent="0" marL="0">
+              <a:buNone/>
+            </a:pPr>
+            <a:r>
+              <a:rPr lang="en-US" sz="4800" b="1" dirty="0">
+                <a:solidFill>
+                  <a:srgbClr val="0D1B2A"/>
+                </a:solidFill>
+                <a:latin typeface="Cambria" pitchFamily="34" charset="0"/>
+                <a:ea typeface="Cambria" pitchFamily="34" charset="-122"/>
+                <a:cs typeface="Cambria" pitchFamily="34" charset="-120"/>
+              </a:rPr>
+              <a:t>—</a:t>
+            </a:r>
+            <a:endParaRPr lang="en-US" sz="4800" dirty="0"/>
+          </a:p>
+        </p:txBody>
+      </p:sp>
+      <p:sp>
+        <p:nvSpPr>
+          <p:cNvPr id="9" name="Text 7"/>
+          <p:cNvSpPr txBox="1"/>
+          <p:nvPr/>
+        </p:nvSpPr>
+        <p:spPr>
+          <a:xfrm>
+            <a:off x="3685032" y="3154680"/>
+            <a:ext cx="1965960" cy="731520"/>
+          </a:xfrm>
+          <a:prstGeom prst="rect">
+            <a:avLst/>
+          </a:prstGeom>
+          <a:noFill/>
+          <a:ln/>
+        </p:spPr>
+        <p:txBody>
+          <a:bodyPr wrap="square" lIns="0" tIns="0" rIns="0" bIns="0" rtlCol="0" anchor="ctr"/>
+          <a:lstStyle/>
+          <a:p>
+            <a:pPr indent="0" marL="0">
+              <a:lnSpc>
+                <a:spcPct val="120000"/>
+              </a:lnSpc>
+              <a:buNone/>
+            </a:pPr>
+            <a:r>
+              <a:rPr lang="en-US" sz="1300" dirty="0">
+                <a:solidFill>
+                  <a:srgbClr val="6A7278"/>
+                </a:solidFill>
+                <a:latin typeface="Calibri" pitchFamily="34" charset="0"/>
+                <a:ea typeface="Calibri" pitchFamily="34" charset="-122"/>
+                <a:cs typeface="Calibri" pitchFamily="34" charset="-120"/>
+              </a:rPr>
+              <a:t>Courses published</a:t>
+            </a:r>
+            <a:endParaRPr lang="en-US" sz="1300" dirty="0"/>
+          </a:p>
+        </p:txBody>
+      </p:sp>
+      <p:sp>
+        <p:nvSpPr>
+          <p:cNvPr id="10" name="Shape 8"/>
+          <p:cNvSpPr/>
+          <p:nvPr/>
+        </p:nvSpPr>
+        <p:spPr>
+          <a:xfrm>
+            <a:off x="6181344" y="1783080"/>
+            <a:ext cx="2514600" cy="2286000"/>
+          </a:xfrm>
+          <a:prstGeom prst="roundRect">
+            <a:avLst>
+              <a:gd name="adj" fmla="val 4000"/>
+            </a:avLst>
+          </a:prstGeom>
+          <a:solidFill>
+            <a:srgbClr val="F7F9F8"/>
+          </a:solidFill>
+          <a:ln/>
+          <a:effectLst>
+            <a:outerShdw sx="100000" sy="100000" kx="0" ky="0" algn="bl" rotWithShape="0" blurRad="127000" dist="25400" dir="5400000">
+              <a:srgbClr val="000000">
+                <a:alpha val="8000"/>
+              </a:srgbClr>
+            </a:outerShdw>
+          </a:effectLst>
+        </p:spPr>
+      </p:sp>
+      <p:sp>
+        <p:nvSpPr>
+          <p:cNvPr id="11" name="Text 9"/>
+          <p:cNvSpPr txBox="1"/>
+          <p:nvPr/>
+        </p:nvSpPr>
+        <p:spPr>
+          <a:xfrm>
+            <a:off x="6455664" y="2167128"/>
+            <a:ext cx="1965960" cy="914400"/>
+          </a:xfrm>
+          <a:prstGeom prst="rect">
+            <a:avLst/>
+          </a:prstGeom>
+          <a:noFill/>
+          <a:ln/>
+        </p:spPr>
+        <p:txBody>
+          <a:bodyPr wrap="square" lIns="0" tIns="0" rIns="0" bIns="0" rtlCol="0" anchor="ctr"/>
+          <a:lstStyle/>
+          <a:p>
+            <a:pPr indent="0" marL="0">
+              <a:buNone/>
+            </a:pPr>
+            <a:r>
+              <a:rPr lang="en-US" sz="4800" b="1" dirty="0">
+                <a:solidFill>
+                  <a:srgbClr val="0D1B2A"/>
+                </a:solidFill>
+                <a:latin typeface="Cambria" pitchFamily="34" charset="0"/>
+                <a:ea typeface="Cambria" pitchFamily="34" charset="-122"/>
+                <a:cs typeface="Cambria" pitchFamily="34" charset="-120"/>
+              </a:rPr>
+              <a:t>—</a:t>
+            </a:r>
+            <a:endParaRPr lang="en-US" sz="4800" dirty="0"/>
+          </a:p>
+        </p:txBody>
+      </p:sp>
+      <p:sp>
+        <p:nvSpPr>
+          <p:cNvPr id="12" name="Text 10"/>
+          <p:cNvSpPr txBox="1"/>
+          <p:nvPr/>
+        </p:nvSpPr>
+        <p:spPr>
+          <a:xfrm>
+            <a:off x="6455664" y="3154680"/>
+            <a:ext cx="1965960" cy="731520"/>
+          </a:xfrm>
+          <a:prstGeom prst="rect">
+            <a:avLst/>
+          </a:prstGeom>
+          <a:noFill/>
+          <a:ln/>
+        </p:spPr>
+        <p:txBody>
+          <a:bodyPr wrap="square" lIns="0" tIns="0" rIns="0" bIns="0" rtlCol="0" anchor="ctr"/>
+          <a:lstStyle/>
+          <a:p>
+            <a:pPr indent="0" marL="0">
+              <a:lnSpc>
+                <a:spcPct val="120000"/>
+              </a:lnSpc>
+              <a:buNone/>
+            </a:pPr>
+            <a:r>
+              <a:rPr lang="en-US" sz="1300" dirty="0">
+                <a:solidFill>
+                  <a:srgbClr val="6A7278"/>
+                </a:solidFill>
+                <a:latin typeface="Calibri" pitchFamily="34" charset="0"/>
+                <a:ea typeface="Calibri" pitchFamily="34" charset="-122"/>
+                <a:cs typeface="Calibri" pitchFamily="34" charset="-120"/>
+              </a:rPr>
+              <a:t>Paying learners</a:t>
+            </a:r>
+            <a:endParaRPr lang="en-US" sz="1300" dirty="0"/>
+          </a:p>
+        </p:txBody>
+      </p:sp>
+      <p:sp>
+        <p:nvSpPr>
+          <p:cNvPr id="13" name="Shape 11"/>
+          <p:cNvSpPr/>
+          <p:nvPr/>
+        </p:nvSpPr>
+        <p:spPr>
+          <a:xfrm>
+            <a:off x="8951976" y="1783080"/>
+            <a:ext cx="2514600" cy="2286000"/>
+          </a:xfrm>
+          <a:prstGeom prst="roundRect">
+            <a:avLst>
+              <a:gd name="adj" fmla="val 4000"/>
+            </a:avLst>
+          </a:prstGeom>
+          <a:solidFill>
+            <a:srgbClr val="F7F9F8"/>
+          </a:solidFill>
+          <a:ln/>
+          <a:effectLst>
+            <a:outerShdw sx="100000" sy="100000" kx="0" ky="0" algn="bl" rotWithShape="0" blurRad="127000" dist="25400" dir="5400000">
+              <a:srgbClr val="000000">
+                <a:alpha val="8000"/>
+              </a:srgbClr>
+            </a:outerShdw>
+          </a:effectLst>
+        </p:spPr>
+      </p:sp>
+      <p:sp>
+        <p:nvSpPr>
+          <p:cNvPr id="14" name="Text 12"/>
+          <p:cNvSpPr txBox="1"/>
+          <p:nvPr/>
+        </p:nvSpPr>
+        <p:spPr>
+          <a:xfrm>
+            <a:off x="9226296" y="2167128"/>
+            <a:ext cx="1965960" cy="914400"/>
+          </a:xfrm>
+          <a:prstGeom prst="rect">
+            <a:avLst/>
+          </a:prstGeom>
+          <a:noFill/>
+          <a:ln/>
+        </p:spPr>
+        <p:txBody>
+          <a:bodyPr wrap="square" lIns="0" tIns="0" rIns="0" bIns="0" rtlCol="0" anchor="ctr"/>
+          <a:lstStyle/>
+          <a:p>
+            <a:pPr indent="0" marL="0">
+              <a:buNone/>
+            </a:pPr>
+            <a:r>
+              <a:rPr lang="en-US" sz="4800" b="1" dirty="0">
+                <a:solidFill>
+                  <a:srgbClr val="0D1B2A"/>
+                </a:solidFill>
+                <a:latin typeface="Cambria" pitchFamily="34" charset="0"/>
+                <a:ea typeface="Cambria" pitchFamily="34" charset="-122"/>
+                <a:cs typeface="Cambria" pitchFamily="34" charset="-120"/>
+              </a:rPr>
+              <a:t>—</a:t>
+            </a:r>
+            <a:endParaRPr lang="en-US" sz="4800" dirty="0"/>
+          </a:p>
+        </p:txBody>
+      </p:sp>
+      <p:sp>
+        <p:nvSpPr>
+          <p:cNvPr id="15" name="Text 13"/>
+          <p:cNvSpPr txBox="1"/>
+          <p:nvPr/>
+        </p:nvSpPr>
+        <p:spPr>
+          <a:xfrm>
+            <a:off x="9226296" y="3154680"/>
+            <a:ext cx="1965960" cy="731520"/>
+          </a:xfrm>
+          <a:prstGeom prst="rect">
+            <a:avLst/>
+          </a:prstGeom>
+          <a:noFill/>
+          <a:ln/>
+        </p:spPr>
+        <p:txBody>
+          <a:bodyPr wrap="square" lIns="0" tIns="0" rIns="0" bIns="0" rtlCol="0" anchor="ctr"/>
+          <a:lstStyle/>
+          <a:p>
+            <a:pPr indent="0" marL="0">
+              <a:lnSpc>
+                <a:spcPct val="120000"/>
+              </a:lnSpc>
+              <a:buNone/>
+            </a:pPr>
+            <a:r>
+              <a:rPr lang="en-US" sz="1300" dirty="0">
+                <a:solidFill>
+                  <a:srgbClr val="6A7278"/>
+                </a:solidFill>
+                <a:latin typeface="Calibri" pitchFamily="34" charset="0"/>
+                <a:ea typeface="Calibri" pitchFamily="34" charset="-122"/>
+                <a:cs typeface="Calibri" pitchFamily="34" charset="-120"/>
+              </a:rPr>
+              <a:t>Gross merchandise value</a:t>
+            </a:r>
+            <a:endParaRPr lang="en-US" sz="1300" dirty="0"/>
+          </a:p>
+        </p:txBody>
+      </p:sp>
+      <p:sp>
+        <p:nvSpPr>
+          <p:cNvPr id="16" name="Shape 14"/>
+          <p:cNvSpPr/>
+          <p:nvPr/>
+        </p:nvSpPr>
+        <p:spPr>
+          <a:xfrm>
+            <a:off x="640080" y="4389120"/>
+            <a:ext cx="10881360" cy="1371600"/>
+          </a:xfrm>
+          <a:prstGeom prst="roundRect">
+            <a:avLst>
+              <a:gd name="adj" fmla="val 6667"/>
+            </a:avLst>
+          </a:prstGeom>
+          <a:solidFill>
+            <a:srgbClr val="E6F2ED"/>
+          </a:solidFill>
+          <a:ln/>
+          <a:effectLst>
+            <a:outerShdw sx="100000" sy="100000" kx="0" ky="0" algn="bl" rotWithShape="0" blurRad="127000" dist="25400" dir="5400000">
+              <a:srgbClr val="000000">
+                <a:alpha val="8000"/>
+              </a:srgbClr>
+            </a:outerShdw>
+          </a:effectLst>
+        </p:spPr>
+      </p:sp>
+      <p:sp>
+        <p:nvSpPr>
+          <p:cNvPr id="17" name="Text 15"/>
+          <p:cNvSpPr txBox="1"/>
+          <p:nvPr/>
+        </p:nvSpPr>
+        <p:spPr>
+          <a:xfrm>
+            <a:off x="1005840" y="4572000"/>
             <a:ext cx="10149840" cy="365760"/>
           </a:xfrm>
           <a:prstGeom prst="rect">
@@ -7087,7 +8059,46 @@
               <a:buNone/>
             </a:pPr>
             <a:r>
-              <a:rPr lang="en-US" sz="1600" b="1" dirty="0">
+              <a:rPr lang="en-US" sz="1500" b="1" dirty="0">
+                <a:solidFill>
+                  <a:srgbClr val="236B50"/>
+                </a:solidFill>
+                <a:latin typeface="Calibri" pitchFamily="34" charset="0"/>
+                <a:ea typeface="Calibri" pitchFamily="34" charset="-122"/>
+                <a:cs typeface="Calibri" pitchFamily="34" charset="-120"/>
+              </a:rPr>
+              <a:t>Milestones to first revenue</a:t>
+            </a:r>
+            <a:endParaRPr lang="en-US" sz="1500" dirty="0"/>
+          </a:p>
+        </p:txBody>
+      </p:sp>
+      <p:sp>
+        <p:nvSpPr>
+          <p:cNvPr id="18" name="Text 16"/>
+          <p:cNvSpPr txBox="1"/>
+          <p:nvPr/>
+        </p:nvSpPr>
+        <p:spPr>
+          <a:xfrm>
+            <a:off x="1005840" y="4983480"/>
+            <a:ext cx="10149840" cy="548640"/>
+          </a:xfrm>
+          <a:prstGeom prst="rect">
+            <a:avLst/>
+          </a:prstGeom>
+          <a:noFill/>
+          <a:ln/>
+        </p:spPr>
+        <p:txBody>
+          <a:bodyPr wrap="square" lIns="0" tIns="0" rIns="0" bIns="0" rtlCol="0" anchor="ctr"/>
+          <a:lstStyle/>
+          <a:p>
+            <a:pPr indent="0" marL="0">
+              <a:buNone/>
+            </a:pPr>
+            <a:r>
+              <a:rPr lang="en-US" sz="1400" dirty="0">
                 <a:solidFill>
                   <a:srgbClr val="0D1B2A"/>
                 </a:solidFill>
@@ -7095,154 +8106,9 @@
                 <a:ea typeface="Calibri" pitchFamily="34" charset="-122"/>
                 <a:cs typeface="Calibri" pitchFamily="34" charset="-120"/>
               </a:rPr>
-              <a:t>Until there are numbers, show evidence instead</a:t>
-            </a:r>
-            <a:endParaRPr lang="en-US" sz="1600" dirty="0"/>
-          </a:p>
-        </p:txBody>
-      </p:sp>
-      <p:sp>
-        <p:nvSpPr>
-          <p:cNvPr id="8" name="Text 6"/>
-          <p:cNvSpPr txBox="1"/>
-          <p:nvPr/>
-        </p:nvSpPr>
-        <p:spPr>
-          <a:xfrm>
-            <a:off x="1005840" y="2971800"/>
-            <a:ext cx="10058400" cy="2103120"/>
-          </a:xfrm>
-          <a:prstGeom prst="rect">
-            <a:avLst/>
-          </a:prstGeom>
-          <a:noFill/>
-          <a:ln/>
-        </p:spPr>
-        <p:txBody>
-          <a:bodyPr wrap="square" lIns="0" tIns="0" rIns="0" bIns="0" rtlCol="0" anchor="ctr"/>
-          <a:lstStyle/>
-          <a:p>
-            <a:pPr marL="342900" indent="-342900">
-              <a:spcAft>
-                <a:spcPts val="1000"/>
-              </a:spcAft>
-              <a:buSzPct val="100000"/>
-              <a:buChar char="•"/>
-            </a:pPr>
-            <a:r>
-              <a:rPr lang="en-US" sz="1350" dirty="0">
-                <a:solidFill>
-                  <a:srgbClr val="0D1B2A"/>
-                </a:solidFill>
-                <a:latin typeface="Calibri" pitchFamily="34" charset="0"/>
-                <a:ea typeface="Calibri" pitchFamily="34" charset="-122"/>
-                <a:cs typeface="Calibri" pitchFamily="34" charset="-120"/>
-              </a:rPr>
-              <a:t>Teachers who have committed to publish at launch, by name and subject</a:t>
-            </a:r>
-            <a:endParaRPr lang="en-US" sz="1350" dirty="0"/>
-          </a:p>
-          <a:p>
-            <a:pPr marL="342900" indent="-342900">
-              <a:spcAft>
-                <a:spcPts val="1000"/>
-              </a:spcAft>
-              <a:buSzPct val="100000"/>
-              <a:buChar char="•"/>
-            </a:pPr>
-            <a:r>
-              <a:rPr lang="en-US" sz="1350" dirty="0">
-                <a:solidFill>
-                  <a:srgbClr val="0D1B2A"/>
-                </a:solidFill>
-                <a:latin typeface="Calibri" pitchFamily="34" charset="0"/>
-                <a:ea typeface="Calibri" pitchFamily="34" charset="-122"/>
-                <a:cs typeface="Calibri" pitchFamily="34" charset="-120"/>
-              </a:rPr>
-              <a:t>Letters of intent, or a waiting list with real sign-ups</a:t>
-            </a:r>
-            <a:endParaRPr lang="en-US" sz="1350" dirty="0"/>
-          </a:p>
-          <a:p>
-            <a:pPr marL="342900" indent="-342900">
-              <a:spcAft>
-                <a:spcPts val="1000"/>
-              </a:spcAft>
-              <a:buSzPct val="100000"/>
-              <a:buChar char="•"/>
-            </a:pPr>
-            <a:r>
-              <a:rPr lang="en-US" sz="1350" dirty="0">
-                <a:solidFill>
-                  <a:srgbClr val="0D1B2A"/>
-                </a:solidFill>
-                <a:latin typeface="Calibri" pitchFamily="34" charset="0"/>
-                <a:ea typeface="Calibri" pitchFamily="34" charset="-122"/>
-                <a:cs typeface="Calibri" pitchFamily="34" charset="-120"/>
-              </a:rPr>
-              <a:t>A pilot cohort: one teacher, one course, real money collected</a:t>
-            </a:r>
-            <a:endParaRPr lang="en-US" sz="1350" dirty="0"/>
-          </a:p>
-          <a:p>
-            <a:pPr marL="342900" indent="-342900">
-              <a:spcAft>
-                <a:spcPts val="1000"/>
-              </a:spcAft>
-              <a:buSzPct val="100000"/>
-              <a:buChar char="•"/>
-            </a:pPr>
-            <a:r>
-              <a:rPr lang="en-US" sz="1350" dirty="0">
-                <a:solidFill>
-                  <a:srgbClr val="0D1B2A"/>
-                </a:solidFill>
-                <a:latin typeface="Calibri" pitchFamily="34" charset="0"/>
-                <a:ea typeface="Calibri" pitchFamily="34" charset="-122"/>
-                <a:cs typeface="Calibri" pitchFamily="34" charset="-120"/>
-              </a:rPr>
-              <a:t>Pre-orders — the strongest possible signal before launch</a:t>
-            </a:r>
-            <a:endParaRPr lang="en-US" sz="1350" dirty="0"/>
-          </a:p>
-        </p:txBody>
-      </p:sp>
-      <p:sp>
-        <p:nvSpPr>
-          <p:cNvPr id="9" name="Text 7"/>
-          <p:cNvSpPr txBox="1"/>
-          <p:nvPr/>
-        </p:nvSpPr>
-        <p:spPr>
-          <a:xfrm>
-            <a:off x="640080" y="5897880"/>
-            <a:ext cx="10881360" cy="548640"/>
-          </a:xfrm>
-          <a:prstGeom prst="rect">
-            <a:avLst/>
-          </a:prstGeom>
-          <a:noFill/>
-          <a:ln/>
-        </p:spPr>
-        <p:txBody>
-          <a:bodyPr wrap="square" rtlCol="0" anchor="ctr"/>
-          <a:lstStyle/>
-          <a:p>
-            <a:pPr indent="0" marL="0">
-              <a:buNone/>
-            </a:pPr>
-            <a:r>
-              <a:rPr lang="en-US" sz="1300" i="1" dirty="0">
-                <a:solidFill>
-                  <a:srgbClr val="6A7278"/>
-                </a:solidFill>
-                <a:latin typeface="Calibri" pitchFamily="34" charset="0"/>
-                <a:ea typeface="Calibri" pitchFamily="34" charset="-122"/>
-                <a:cs typeface="Calibri" pitchFamily="34" charset="-120"/>
-              </a:rPr>
-              <a:t>One real teacher with ten paying students beats any projection. Get that before raising if you possibly can.</a:t>
-            </a:r>
-            <a:endParaRPr lang="en-US" sz="1300" dirty="0"/>
+              <a:t>Teacher cohort recruited  ·  first paid course live  ·  payout completed end to end</a:t>
+            </a:r>
+            <a:endParaRPr lang="en-US" sz="1400" dirty="0"/>
           </a:p>
         </p:txBody>
       </p:sp>
@@ -7343,7 +8209,7 @@
                 <a:ea typeface="Calibri" pitchFamily="34" charset="-122"/>
                 <a:cs typeface="Calibri" pitchFamily="34" charset="-120"/>
               </a:rPr>
-              <a:t>Honestly placed. We lose on catalogue and brand, and win on economics and reach.</a:t>
+              <a:t>Where we lead, and where we do not.</a:t>
             </a:r>
             <a:endParaRPr lang="en-US" sz="1500" dirty="0"/>
           </a:p>
